--- a/slide/Slide_TOAN10_BaiTapCuoiChuong2_T15.pptx
+++ b/slide/Slide_TOAN10_BaiTapCuoiChuong2_T15.pptx
@@ -4066,7 +4066,7 @@
         <p:spPr>
           <a:xfrm>
             <a:off x="731520" y="274320"/>
-            <a:ext cx="10972800" cy="868680"/>
+            <a:ext cx="9848088" cy="868680"/>
           </a:xfrm>
           <a:prstGeom prst="rect">
             <a:avLst/>
@@ -4391,6 +4391,59 @@
           </p:sp>
         </mc:Fallback>
       </mc:AlternateContent>
+      <p:sp>
+        <p:nvSpPr>
+          <p:cNvPr id="7" name="Rounded Rectangle 6"/>
+          <p:cNvSpPr/>
+          <p:nvPr/>
+        </p:nvSpPr>
+        <p:spPr>
+          <a:xfrm>
+            <a:off x="10701223" y="457200"/>
+            <a:ext cx="941832" cy="457200"/>
+          </a:xfrm>
+          <a:prstGeom prst="roundRect">
+            <a:avLst/>
+          </a:prstGeom>
+          <a:solidFill>
+            <a:srgbClr val="1E40AF"/>
+          </a:solidFill>
+          <a:ln>
+            <a:noFill/>
+          </a:ln>
+          <a:effectLst/>
+        </p:spPr>
+        <p:style>
+          <a:lnRef idx="1">
+            <a:schemeClr val="accent1"/>
+          </a:lnRef>
+          <a:fillRef idx="3">
+            <a:schemeClr val="accent1"/>
+          </a:fillRef>
+          <a:effectRef idx="2">
+            <a:schemeClr val="accent1"/>
+          </a:effectRef>
+          <a:fontRef idx="minor">
+            <a:schemeClr val="lt1"/>
+          </a:fontRef>
+        </p:style>
+        <p:txBody>
+          <a:bodyPr rtlCol="0" anchor="ctr" tIns="0" bIns="0"/>
+          <a:lstStyle/>
+          <a:p>
+            <a:pPr algn="ctr"/>
+            <a:r>
+              <a:rPr sz="1400" b="1">
+                <a:solidFill>
+                  <a:srgbClr val="FFFFFF"/>
+                </a:solidFill>
+                <a:latin typeface="Arial"/>
+              </a:rPr>
+              <a:t>ĐỀ BÀI</a:t>
+            </a:r>
+          </a:p>
+        </p:txBody>
+      </p:sp>
     </p:spTree>
   </p:cSld>
   <p:clrMapOvr>
@@ -4470,7 +4523,461 @@
         <p:spPr>
           <a:xfrm>
             <a:off x="731520" y="274320"/>
-            <a:ext cx="10972800" cy="868680"/>
+            <a:ext cx="9610344" cy="868680"/>
+          </a:xfrm>
+          <a:prstGeom prst="rect">
+            <a:avLst/>
+          </a:prstGeom>
+          <a:noFill/>
+        </p:spPr>
+        <p:txBody>
+          <a:bodyPr wrap="none" anchor="ctr">
+            <a:spAutoFit/>
+          </a:bodyPr>
+          <a:lstStyle/>
+          <a:p>
+            <a:r>
+              <a:rPr sz="3600" b="1">
+                <a:solidFill>
+                  <a:srgbClr val="1E40AF"/>
+                </a:solidFill>
+                <a:latin typeface="Arial"/>
+              </a:rPr>
+              <a:t>BÀI 2.12</a:t>
+            </a:r>
+          </a:p>
+        </p:txBody>
+      </p:sp>
+      <p:sp>
+        <p:nvSpPr>
+          <p:cNvPr id="4" name="Rectangle 3"/>
+          <p:cNvSpPr/>
+          <p:nvPr/>
+        </p:nvSpPr>
+        <p:spPr>
+          <a:xfrm>
+            <a:off x="457200" y="1207008"/>
+            <a:ext cx="11274552" cy="22000"/>
+          </a:xfrm>
+          <a:prstGeom prst="rect">
+            <a:avLst/>
+          </a:prstGeom>
+          <a:solidFill>
+            <a:srgbClr val="E2E8F0"/>
+          </a:solidFill>
+          <a:ln>
+            <a:noFill/>
+          </a:ln>
+          <a:effectLst/>
+        </p:spPr>
+        <p:style>
+          <a:lnRef idx="1">
+            <a:schemeClr val="accent1"/>
+          </a:lnRef>
+          <a:fillRef idx="3">
+            <a:schemeClr val="accent1"/>
+          </a:fillRef>
+          <a:effectRef idx="2">
+            <a:schemeClr val="accent1"/>
+          </a:effectRef>
+          <a:fontRef idx="minor">
+            <a:schemeClr val="lt1"/>
+          </a:fontRef>
+        </p:style>
+        <p:txBody>
+          <a:bodyPr rtlCol="0" anchor="ctr"/>
+          <a:lstStyle/>
+          <a:p>
+            <a:pPr algn="ctr"/>
+          </a:p>
+        </p:txBody>
+      </p:sp>
+      <p:sp>
+        <p:nvSpPr>
+          <p:cNvPr id="5" name="TextBox 4"/>
+          <p:cNvSpPr txBox="1"/>
+          <p:nvPr/>
+        </p:nvSpPr>
+        <p:spPr>
+          <a:xfrm>
+            <a:off x="457200" y="6355080"/>
+            <a:ext cx="11274552" cy="365760"/>
+          </a:xfrm>
+          <a:prstGeom prst="rect">
+            <a:avLst/>
+          </a:prstGeom>
+          <a:noFill/>
+        </p:spPr>
+        <p:txBody>
+          <a:bodyPr wrap="none">
+            <a:spAutoFit/>
+          </a:bodyPr>
+          <a:lstStyle/>
+          <a:p>
+            <a:pPr algn="r"/>
+            <a:r>
+              <a:rPr sz="1200">
+                <a:solidFill>
+                  <a:srgbClr val="64748B"/>
+                </a:solidFill>
+                <a:latin typeface="Calibri"/>
+              </a:rPr>
+              <a:t>Toán 10 · Bài tập cuối chương II          12</a:t>
+            </a:r>
+          </a:p>
+        </p:txBody>
+      </p:sp>
+      <p:sp>
+        <p:nvSpPr>
+          <p:cNvPr id="6" name="TextBox 5"/>
+          <p:cNvSpPr txBox="1"/>
+          <p:nvPr/>
+        </p:nvSpPr>
+        <p:spPr>
+          <a:xfrm>
+            <a:off x="731520" y="1463040"/>
+            <a:ext cx="6400800" cy="3657600"/>
+          </a:xfrm>
+          <a:prstGeom prst="rect">
+            <a:avLst/>
+          </a:prstGeom>
+          <a:noFill/>
+        </p:spPr>
+        <p:txBody>
+          <a:bodyPr wrap="square" anchor="t">
+            <a:spAutoFit/>
+          </a:bodyPr>
+          <a:lstStyle/>
+          <a:p>
+            <a:pPr algn="l" marL="365760" indent="-365760">
+              <a:spcAft>
+                <a:spcPts val="1000"/>
+              </a:spcAft>
+              <a:buClr>
+                <a:srgbClr val="1E40AF"/>
+              </a:buClr>
+              <a:buFont typeface="Arial"/>
+              <a:buChar char="•"/>
+            </a:pPr>
+            <a:r>
+              <a:rPr sz="2400">
+                <a:solidFill>
+                  <a:srgbClr val="1E293B"/>
+                </a:solidFill>
+                <a:latin typeface="Calibri"/>
+              </a:rPr>
+              <a:t>Quy đồng: 3(x + y) ≥ 2(2x − y + 1)</a:t>
+            </a:r>
+          </a:p>
+          <a:p>
+            <a:pPr algn="l" marL="365760" indent="-365760">
+              <a:spcAft>
+                <a:spcPts val="1000"/>
+              </a:spcAft>
+              <a:buClr>
+                <a:srgbClr val="1E40AF"/>
+              </a:buClr>
+              <a:buFont typeface="Arial"/>
+              <a:buChar char="•"/>
+            </a:pPr>
+            <a:r>
+              <a:rPr sz="2400">
+                <a:solidFill>
+                  <a:srgbClr val="1E293B"/>
+                </a:solidFill>
+                <a:latin typeface="Calibri"/>
+              </a:rPr>
+              <a:t>d qua (−2; 0) và (3; 1), nét liền</a:t>
+            </a:r>
+          </a:p>
+          <a:p>
+            <a:pPr algn="l" marL="365760" indent="-365760">
+              <a:spcAft>
+                <a:spcPts val="1000"/>
+              </a:spcAft>
+              <a:buClr>
+                <a:srgbClr val="1E40AF"/>
+              </a:buClr>
+              <a:buFont typeface="Arial"/>
+              <a:buChar char="•"/>
+            </a:pPr>
+            <a:r>
+              <a:rPr sz="2400">
+                <a:solidFill>
+                  <a:srgbClr val="1E293B"/>
+                </a:solidFill>
+                <a:latin typeface="Calibri"/>
+              </a:rPr>
+              <a:t>Thay O(0; 0): 2 ≤ 0 sai</a:t>
+            </a:r>
+          </a:p>
+          <a:p>
+            <a:pPr algn="l" marL="365760" indent="-365760">
+              <a:spcAft>
+                <a:spcPts val="1000"/>
+              </a:spcAft>
+              <a:buClr>
+                <a:srgbClr val="1E40AF"/>
+              </a:buClr>
+              <a:buFont typeface="Arial"/>
+              <a:buChar char="•"/>
+            </a:pPr>
+            <a:r>
+              <a:rPr sz="2400">
+                <a:solidFill>
+                  <a:srgbClr val="1E293B"/>
+                </a:solidFill>
+                <a:latin typeface="Calibri"/>
+              </a:rPr>
+              <a:t>Giữ nửa mặt phẳng không chứa O</a:t>
+            </a:r>
+          </a:p>
+        </p:txBody>
+      </p:sp>
+      <p:sp>
+        <p:nvSpPr>
+          <p:cNvPr id="7" name="Rounded Rectangle 6"/>
+          <p:cNvSpPr/>
+          <p:nvPr/>
+        </p:nvSpPr>
+        <p:spPr>
+          <a:xfrm>
+            <a:off x="731520" y="4754880"/>
+            <a:ext cx="6035040" cy="1097280"/>
+          </a:xfrm>
+          <a:prstGeom prst="roundRect">
+            <a:avLst>
+              <a:gd name="adj" fmla="val 8000"/>
+            </a:avLst>
+          </a:prstGeom>
+          <a:solidFill>
+            <a:srgbClr val="FEF2F2"/>
+          </a:solidFill>
+          <a:ln w="19050">
+            <a:solidFill>
+              <a:srgbClr val="991B1B"/>
+            </a:solidFill>
+          </a:ln>
+          <a:effectLst/>
+        </p:spPr>
+        <p:style>
+          <a:lnRef idx="1">
+            <a:schemeClr val="accent1"/>
+          </a:lnRef>
+          <a:fillRef idx="3">
+            <a:schemeClr val="accent1"/>
+          </a:fillRef>
+          <a:effectRef idx="2">
+            <a:schemeClr val="accent1"/>
+          </a:effectRef>
+          <a:fontRef idx="minor">
+            <a:schemeClr val="lt1"/>
+          </a:fontRef>
+        </p:style>
+        <p:txBody>
+          <a:bodyPr rtlCol="0" anchor="ctr"/>
+          <a:lstStyle/>
+          <a:p>
+            <a:pPr algn="ctr"/>
+          </a:p>
+        </p:txBody>
+      </p:sp>
+      <p:sp>
+        <p:nvSpPr>
+          <p:cNvPr id="8" name="TextBox 7"/>
+          <p:cNvSpPr txBox="1"/>
+          <p:nvPr/>
+        </p:nvSpPr>
+        <p:spPr>
+          <a:xfrm>
+            <a:off x="914400" y="4846320"/>
+            <a:ext cx="5669280" cy="914400"/>
+          </a:xfrm>
+          <a:prstGeom prst="rect">
+            <a:avLst/>
+          </a:prstGeom>
+          <a:noFill/>
+        </p:spPr>
+        <p:txBody>
+          <a:bodyPr wrap="square" anchor="ctr">
+            <a:spAutoFit/>
+          </a:bodyPr>
+          <a:lstStyle/>
+          <a:p>
+            <a:pPr algn="l">
+              <a:spcAft>
+                <a:spcPts val="1000"/>
+              </a:spcAft>
+            </a:pPr>
+            <a:r>
+              <a:rPr sz="2800" b="1">
+                <a:solidFill>
+                  <a:srgbClr val="991B1B"/>
+                </a:solidFill>
+                <a:latin typeface="Calibri"/>
+              </a:rPr>
+              <a:t>⇔  x − 5y + 2 ≤ 0</a:t>
+            </a:r>
+          </a:p>
+        </p:txBody>
+      </p:sp>
+      <p:pic>
+        <p:nvPicPr>
+          <p:cNvPr id="9" name="Picture 8" descr="fig_2_12.png"/>
+          <p:cNvPicPr>
+            <a:picLocks noChangeAspect="1"/>
+          </p:cNvPicPr>
+          <p:nvPr/>
+        </p:nvPicPr>
+        <p:blipFill>
+          <a:blip r:embed="rId2"/>
+          <a:stretch>
+            <a:fillRect/>
+          </a:stretch>
+        </p:blipFill>
+        <p:spPr>
+          <a:xfrm>
+            <a:off x="7132320" y="1737360"/>
+            <a:ext cx="4663440" cy="3586457"/>
+          </a:xfrm>
+          <a:prstGeom prst="rect">
+            <a:avLst/>
+          </a:prstGeom>
+        </p:spPr>
+      </p:pic>
+      <p:sp>
+        <p:nvSpPr>
+          <p:cNvPr id="10" name="Rounded Rectangle 9"/>
+          <p:cNvSpPr/>
+          <p:nvPr/>
+        </p:nvSpPr>
+        <p:spPr>
+          <a:xfrm>
+            <a:off x="10463479" y="457200"/>
+            <a:ext cx="1179576" cy="457200"/>
+          </a:xfrm>
+          <a:prstGeom prst="roundRect">
+            <a:avLst/>
+          </a:prstGeom>
+          <a:solidFill>
+            <a:srgbClr val="166534"/>
+          </a:solidFill>
+          <a:ln>
+            <a:noFill/>
+          </a:ln>
+          <a:effectLst/>
+        </p:spPr>
+        <p:style>
+          <a:lnRef idx="1">
+            <a:schemeClr val="accent1"/>
+          </a:lnRef>
+          <a:fillRef idx="3">
+            <a:schemeClr val="accent1"/>
+          </a:fillRef>
+          <a:effectRef idx="2">
+            <a:schemeClr val="accent1"/>
+          </a:effectRef>
+          <a:fontRef idx="minor">
+            <a:schemeClr val="lt1"/>
+          </a:fontRef>
+        </p:style>
+        <p:txBody>
+          <a:bodyPr rtlCol="0" anchor="ctr" tIns="0" bIns="0"/>
+          <a:lstStyle/>
+          <a:p>
+            <a:pPr algn="ctr"/>
+            <a:r>
+              <a:rPr sz="1400" b="1">
+                <a:solidFill>
+                  <a:srgbClr val="FFFFFF"/>
+                </a:solidFill>
+                <a:latin typeface="Arial"/>
+              </a:rPr>
+              <a:t>LỜI GIẢI</a:t>
+            </a:r>
+          </a:p>
+        </p:txBody>
+      </p:sp>
+    </p:spTree>
+  </p:cSld>
+  <p:clrMapOvr>
+    <a:masterClrMapping/>
+  </p:clrMapOvr>
+</p:sld>
+</file>
+
+<file path=ppt/slides/slide13.xml><?xml version="1.0" encoding="utf-8"?>
+<p:sld xmlns:a="http://schemas.openxmlformats.org/drawingml/2006/main" xmlns:p="http://schemas.openxmlformats.org/presentationml/2006/main" xmlns:r="http://schemas.openxmlformats.org/officeDocument/2006/relationships">
+  <p:cSld>
+    <p:bg>
+      <p:bgPr>
+        <a:solidFill>
+          <a:srgbClr val="FFFFFF"/>
+        </a:solidFill>
+        <a:effectLst/>
+      </p:bgPr>
+    </p:bg>
+    <p:spTree>
+      <p:nvGrpSpPr>
+        <p:cNvPr id="1" name=""/>
+        <p:cNvGrpSpPr/>
+        <p:nvPr/>
+      </p:nvGrpSpPr>
+      <p:grpSpPr/>
+      <p:sp>
+        <p:nvSpPr>
+          <p:cNvPr id="2" name="Rectangle 1"/>
+          <p:cNvSpPr/>
+          <p:nvPr/>
+        </p:nvSpPr>
+        <p:spPr>
+          <a:xfrm>
+            <a:off x="457200" y="384048"/>
+            <a:ext cx="109728" cy="658368"/>
+          </a:xfrm>
+          <a:prstGeom prst="rect">
+            <a:avLst/>
+          </a:prstGeom>
+          <a:solidFill>
+            <a:srgbClr val="1E40AF"/>
+          </a:solidFill>
+          <a:ln>
+            <a:noFill/>
+          </a:ln>
+          <a:effectLst/>
+        </p:spPr>
+        <p:style>
+          <a:lnRef idx="1">
+            <a:schemeClr val="accent1"/>
+          </a:lnRef>
+          <a:fillRef idx="3">
+            <a:schemeClr val="accent1"/>
+          </a:fillRef>
+          <a:effectRef idx="2">
+            <a:schemeClr val="accent1"/>
+          </a:effectRef>
+          <a:fontRef idx="minor">
+            <a:schemeClr val="lt1"/>
+          </a:fontRef>
+        </p:style>
+        <p:txBody>
+          <a:bodyPr rtlCol="0" anchor="ctr"/>
+          <a:lstStyle/>
+          <a:p>
+            <a:pPr algn="ctr"/>
+          </a:p>
+        </p:txBody>
+      </p:sp>
+      <p:sp>
+        <p:nvSpPr>
+          <p:cNvPr id="3" name="TextBox 2"/>
+          <p:cNvSpPr txBox="1"/>
+          <p:nvPr/>
+        </p:nvSpPr>
+        <p:spPr>
+          <a:xfrm>
+            <a:off x="731520" y="274320"/>
+            <a:ext cx="9848088" cy="868680"/>
           </a:xfrm>
           <a:prstGeom prst="rect">
             <a:avLst/>
@@ -4793,44 +5300,18 @@
           </p:sp>
         </mc:Fallback>
       </mc:AlternateContent>
-    </p:spTree>
-  </p:cSld>
-  <p:clrMapOvr>
-    <a:masterClrMapping/>
-  </p:clrMapOvr>
-</p:sld>
-</file>
-
-<file path=ppt/slides/slide13.xml><?xml version="1.0" encoding="utf-8"?>
-<p:sld xmlns:a="http://schemas.openxmlformats.org/drawingml/2006/main" xmlns:p="http://schemas.openxmlformats.org/presentationml/2006/main" xmlns:r="http://schemas.openxmlformats.org/officeDocument/2006/relationships">
-  <p:cSld>
-    <p:bg>
-      <p:bgPr>
-        <a:solidFill>
-          <a:srgbClr val="FFFFFF"/>
-        </a:solidFill>
-        <a:effectLst/>
-      </p:bgPr>
-    </p:bg>
-    <p:spTree>
-      <p:nvGrpSpPr>
-        <p:cNvPr id="1" name=""/>
-        <p:cNvGrpSpPr/>
-        <p:nvPr/>
-      </p:nvGrpSpPr>
-      <p:grpSpPr/>
-      <p:sp>
-        <p:nvSpPr>
-          <p:cNvPr id="2" name="Rectangle 1"/>
+      <p:sp>
+        <p:nvSpPr>
+          <p:cNvPr id="7" name="Rounded Rectangle 6"/>
           <p:cNvSpPr/>
           <p:nvPr/>
         </p:nvSpPr>
         <p:spPr>
           <a:xfrm>
-            <a:off x="457200" y="384048"/>
-            <a:ext cx="109728" cy="658368"/>
-          </a:xfrm>
-          <a:prstGeom prst="rect">
+            <a:off x="10701223" y="457200"/>
+            <a:ext cx="941832" cy="457200"/>
+          </a:xfrm>
+          <a:prstGeom prst="roundRect">
             <a:avLst/>
           </a:prstGeom>
           <a:solidFill>
@@ -4856,224 +5337,18 @@
           </a:fontRef>
         </p:style>
         <p:txBody>
-          <a:bodyPr rtlCol="0" anchor="ctr"/>
+          <a:bodyPr rtlCol="0" anchor="ctr" tIns="0" bIns="0"/>
           <a:lstStyle/>
           <a:p>
             <a:pPr algn="ctr"/>
-          </a:p>
-        </p:txBody>
-      </p:sp>
-      <p:sp>
-        <p:nvSpPr>
-          <p:cNvPr id="3" name="TextBox 2"/>
-          <p:cNvSpPr txBox="1"/>
-          <p:nvPr/>
-        </p:nvSpPr>
-        <p:spPr>
-          <a:xfrm>
-            <a:off x="731520" y="274320"/>
-            <a:ext cx="10972800" cy="868680"/>
-          </a:xfrm>
-          <a:prstGeom prst="rect">
-            <a:avLst/>
-          </a:prstGeom>
-          <a:noFill/>
-        </p:spPr>
-        <p:txBody>
-          <a:bodyPr wrap="none" anchor="ctr">
-            <a:spAutoFit/>
-          </a:bodyPr>
-          <a:lstStyle/>
-          <a:p>
-            <a:r>
-              <a:rPr sz="3600" b="1">
-                <a:solidFill>
-                  <a:srgbClr val="1E40AF"/>
+            <a:r>
+              <a:rPr sz="1400" b="1">
+                <a:solidFill>
+                  <a:srgbClr val="FFFFFF"/>
                 </a:solidFill>
                 <a:latin typeface="Arial"/>
               </a:rPr>
-              <a:t>BÀI 2.14</a:t>
-            </a:r>
-          </a:p>
-        </p:txBody>
-      </p:sp>
-      <p:sp>
-        <p:nvSpPr>
-          <p:cNvPr id="4" name="Rectangle 3"/>
-          <p:cNvSpPr/>
-          <p:nvPr/>
-        </p:nvSpPr>
-        <p:spPr>
-          <a:xfrm>
-            <a:off x="457200" y="1207008"/>
-            <a:ext cx="11274552" cy="22000"/>
-          </a:xfrm>
-          <a:prstGeom prst="rect">
-            <a:avLst/>
-          </a:prstGeom>
-          <a:solidFill>
-            <a:srgbClr val="E2E8F0"/>
-          </a:solidFill>
-          <a:ln>
-            <a:noFill/>
-          </a:ln>
-          <a:effectLst/>
-        </p:spPr>
-        <p:style>
-          <a:lnRef idx="1">
-            <a:schemeClr val="accent1"/>
-          </a:lnRef>
-          <a:fillRef idx="3">
-            <a:schemeClr val="accent1"/>
-          </a:fillRef>
-          <a:effectRef idx="2">
-            <a:schemeClr val="accent1"/>
-          </a:effectRef>
-          <a:fontRef idx="minor">
-            <a:schemeClr val="lt1"/>
-          </a:fontRef>
-        </p:style>
-        <p:txBody>
-          <a:bodyPr rtlCol="0" anchor="ctr"/>
-          <a:lstStyle/>
-          <a:p>
-            <a:pPr algn="ctr"/>
-          </a:p>
-        </p:txBody>
-      </p:sp>
-      <p:sp>
-        <p:nvSpPr>
-          <p:cNvPr id="5" name="TextBox 4"/>
-          <p:cNvSpPr txBox="1"/>
-          <p:nvPr/>
-        </p:nvSpPr>
-        <p:spPr>
-          <a:xfrm>
-            <a:off x="457200" y="6355080"/>
-            <a:ext cx="11274552" cy="365760"/>
-          </a:xfrm>
-          <a:prstGeom prst="rect">
-            <a:avLst/>
-          </a:prstGeom>
-          <a:noFill/>
-        </p:spPr>
-        <p:txBody>
-          <a:bodyPr wrap="none">
-            <a:spAutoFit/>
-          </a:bodyPr>
-          <a:lstStyle/>
-          <a:p>
-            <a:pPr algn="r"/>
-            <a:r>
-              <a:rPr sz="1200">
-                <a:solidFill>
-                  <a:srgbClr val="64748B"/>
-                </a:solidFill>
-                <a:latin typeface="Calibri"/>
-              </a:rPr>
-              <a:t>Toán 10 · Bài tập cuối chương II          15</a:t>
-            </a:r>
-          </a:p>
-        </p:txBody>
-      </p:sp>
-      <p:sp>
-        <p:nvSpPr>
-          <p:cNvPr id="6" name="TextBox 5"/>
-          <p:cNvSpPr txBox="1"/>
-          <p:nvPr/>
-        </p:nvSpPr>
-        <p:spPr>
-          <a:xfrm>
-            <a:off x="731520" y="1508760"/>
-            <a:ext cx="10789920" cy="2267712"/>
-          </a:xfrm>
-          <a:prstGeom prst="rect">
-            <a:avLst/>
-          </a:prstGeom>
-          <a:noFill/>
-        </p:spPr>
-        <p:txBody>
-          <a:bodyPr wrap="square" anchor="t">
-            <a:spAutoFit/>
-          </a:bodyPr>
-          <a:lstStyle/>
-          <a:p>
-            <a:pPr algn="l" marL="365760" indent="-365760">
-              <a:spcAft>
-                <a:spcPts val="1000"/>
-              </a:spcAft>
-              <a:buClr>
-                <a:srgbClr val="1E40AF"/>
-              </a:buClr>
-              <a:buFont typeface="Arial"/>
-              <a:buChar char="•"/>
-            </a:pPr>
-            <a:r>
-              <a:rPr sz="2400">
-                <a:solidFill>
-                  <a:srgbClr val="1E293B"/>
-                </a:solidFill>
-                <a:latin typeface="Calibri"/>
-              </a:rPr>
-              <a:t>Biểu diễn miền nghiệm hệ (SGK)</a:t>
-            </a:r>
-          </a:p>
-          <a:p>
-            <a:pPr algn="l" marL="365760" indent="-365760">
-              <a:spcAft>
-                <a:spcPts val="1000"/>
-              </a:spcAft>
-              <a:buClr>
-                <a:srgbClr val="1E40AF"/>
-              </a:buClr>
-              <a:buFont typeface="Arial"/>
-              <a:buChar char="•"/>
-            </a:pPr>
-            <a:r>
-              <a:rPr sz="2400">
-                <a:solidFill>
-                  <a:srgbClr val="1E293B"/>
-                </a:solidFill>
-                <a:latin typeface="Calibri"/>
-              </a:rPr>
-              <a:t>Tìm GTLN, GTNN của F = −x − y</a:t>
-            </a:r>
-          </a:p>
-          <a:p>
-            <a:pPr algn="l" marL="365760" indent="-365760">
-              <a:spcAft>
-                <a:spcPts val="1000"/>
-              </a:spcAft>
-              <a:buClr>
-                <a:srgbClr val="1E40AF"/>
-              </a:buClr>
-              <a:buFont typeface="Arial"/>
-              <a:buChar char="•"/>
-            </a:pPr>
-            <a:r>
-              <a:rPr sz="2400">
-                <a:solidFill>
-                  <a:srgbClr val="1E293B"/>
-                </a:solidFill>
-                <a:latin typeface="Calibri"/>
-              </a:rPr>
-              <a:t>trên miền nghiệm đó</a:t>
-            </a:r>
-          </a:p>
-          <a:p>
-            <a:pPr algn="l">
-              <a:spcAft>
-                <a:spcPts val="1000"/>
-              </a:spcAft>
-            </a:pPr>
-            <a:r>
-              <a:rPr sz="2400" b="1">
-                <a:solidFill>
-                  <a:srgbClr val="1E40AF"/>
-                </a:solidFill>
-                <a:latin typeface="Calibri"/>
-              </a:rPr>
-              <a:t>Gợi mở: Tính F tại các đỉnh</a:t>
+              <a:t>ĐỀ BÀI</a:t>
             </a:r>
           </a:p>
         </p:txBody>
@@ -5157,7 +5432,7 @@
         <p:spPr>
           <a:xfrm>
             <a:off x="731520" y="274320"/>
-            <a:ext cx="10972800" cy="868680"/>
+            <a:ext cx="9610344" cy="868680"/>
           </a:xfrm>
           <a:prstGeom prst="rect">
             <a:avLst/>
@@ -5177,7 +5452,7 @@
                 </a:solidFill>
                 <a:latin typeface="Arial"/>
               </a:rPr>
-              <a:t>BÀI 2.15 – ĐẦU TƯ TRÁI PHIẾU</a:t>
+              <a:t>BÀI 2.13</a:t>
             </a:r>
           </a:p>
         </p:txBody>
@@ -5256,7 +5531,7 @@
                 </a:solidFill>
                 <a:latin typeface="Calibri"/>
               </a:rPr>
-              <a:t>Toán 10 · Bài tập cuối chương II          17</a:t>
+              <a:t>Toán 10 · Bài tập cuối chương II          14</a:t>
             </a:r>
           </a:p>
         </p:txBody>
@@ -5269,8 +5544,8 @@
         </p:nvSpPr>
         <p:spPr>
           <a:xfrm>
-            <a:off x="731520" y="1508760"/>
-            <a:ext cx="10789920" cy="2834640"/>
+            <a:off x="731520" y="1463040"/>
+            <a:ext cx="6400800" cy="3840480"/>
           </a:xfrm>
           <a:prstGeom prst="rect">
             <a:avLst/>
@@ -5300,7 +5575,7 @@
                 </a:solidFill>
                 <a:latin typeface="Calibri"/>
               </a:rPr>
-              <a:t>Đầu tư 1 200 triệu vào 3 loại trái phiếu</a:t>
+              <a:t>d₁: x + y = 1, nét đứt</a:t>
             </a:r>
           </a:p>
           <a:p>
@@ -5321,7 +5596,7 @@
                 </a:solidFill>
                 <a:latin typeface="Calibri"/>
               </a:rPr>
-              <a:t>Lãi: chính phủ 7%, ngân hàng 8%, DN 12%</a:t>
+              <a:t>O thỏa mãn → giữ phía chứa O</a:t>
             </a:r>
           </a:p>
           <a:p>
@@ -5342,7 +5617,7 @@
                 </a:solidFill>
                 <a:latin typeface="Calibri"/>
               </a:rPr>
-              <a:t>Chính phủ ≥ 3 lần ngân hàng</a:t>
+              <a:t>d₂: 2x − y = 3, nét liền</a:t>
             </a:r>
           </a:p>
           <a:p>
@@ -5363,28 +5638,187 @@
                 </a:solidFill>
                 <a:latin typeface="Calibri"/>
               </a:rPr>
-              <a:t>Doanh nghiệp tối đa 200 triệu</a:t>
-            </a:r>
-          </a:p>
-          <a:p>
-            <a:pPr algn="l" marL="365760" indent="-365760">
+              <a:t>O không thỏa mãn → bỏ phía chứa O</a:t>
+            </a:r>
+          </a:p>
+        </p:txBody>
+      </p:sp>
+      <p:sp>
+        <p:nvSpPr>
+          <p:cNvPr id="7" name="Rounded Rectangle 6"/>
+          <p:cNvSpPr/>
+          <p:nvPr/>
+        </p:nvSpPr>
+        <p:spPr>
+          <a:xfrm>
+            <a:off x="731520" y="4572000"/>
+            <a:ext cx="6035040" cy="1371600"/>
+          </a:xfrm>
+          <a:prstGeom prst="roundRect">
+            <a:avLst>
+              <a:gd name="adj" fmla="val 8000"/>
+            </a:avLst>
+          </a:prstGeom>
+          <a:solidFill>
+            <a:srgbClr val="FEF2F2"/>
+          </a:solidFill>
+          <a:ln w="19050">
+            <a:solidFill>
+              <a:srgbClr val="991B1B"/>
+            </a:solidFill>
+          </a:ln>
+          <a:effectLst/>
+        </p:spPr>
+        <p:style>
+          <a:lnRef idx="1">
+            <a:schemeClr val="accent1"/>
+          </a:lnRef>
+          <a:fillRef idx="3">
+            <a:schemeClr val="accent1"/>
+          </a:fillRef>
+          <a:effectRef idx="2">
+            <a:schemeClr val="accent1"/>
+          </a:effectRef>
+          <a:fontRef idx="minor">
+            <a:schemeClr val="lt1"/>
+          </a:fontRef>
+        </p:style>
+        <p:txBody>
+          <a:bodyPr rtlCol="0" anchor="ctr"/>
+          <a:lstStyle/>
+          <a:p>
+            <a:pPr algn="ctr"/>
+          </a:p>
+        </p:txBody>
+      </p:sp>
+      <p:sp>
+        <p:nvSpPr>
+          <p:cNvPr id="8" name="TextBox 7"/>
+          <p:cNvSpPr txBox="1"/>
+          <p:nvPr/>
+        </p:nvSpPr>
+        <p:spPr>
+          <a:xfrm>
+            <a:off x="914400" y="4663440"/>
+            <a:ext cx="5669280" cy="1188720"/>
+          </a:xfrm>
+          <a:prstGeom prst="rect">
+            <a:avLst/>
+          </a:prstGeom>
+          <a:noFill/>
+        </p:spPr>
+        <p:txBody>
+          <a:bodyPr wrap="square" anchor="ctr">
+            <a:spAutoFit/>
+          </a:bodyPr>
+          <a:lstStyle/>
+          <a:p>
+            <a:pPr algn="l">
               <a:spcAft>
                 <a:spcPts val="1000"/>
               </a:spcAft>
-              <a:buClr>
-                <a:srgbClr val="1E40AF"/>
-              </a:buClr>
-              <a:buFont typeface="Arial"/>
-              <a:buChar char="•"/>
             </a:pPr>
             <a:r>
-              <a:rPr sz="2400">
-                <a:solidFill>
-                  <a:srgbClr val="1E293B"/>
+              <a:rPr sz="2200" b="1">
+                <a:solidFill>
+                  <a:srgbClr val="991B1B"/>
                 </a:solidFill>
                 <a:latin typeface="Calibri"/>
               </a:rPr>
-              <a:t>Đầu tư thế nào lãi lớn nhất?</a:t>
+              <a:t>Điểm (4/3; −1/3) nằm trên d₁</a:t>
+            </a:r>
+          </a:p>
+          <a:p>
+            <a:pPr algn="l">
+              <a:spcAft>
+                <a:spcPts val="1000"/>
+              </a:spcAft>
+            </a:pPr>
+            <a:r>
+              <a:rPr sz="2200" b="1">
+                <a:solidFill>
+                  <a:srgbClr val="991B1B"/>
+                </a:solidFill>
+                <a:latin typeface="Calibri"/>
+              </a:rPr>
+              <a:t>→ không thuộc miền nghiệm</a:t>
+            </a:r>
+          </a:p>
+        </p:txBody>
+      </p:sp>
+      <p:pic>
+        <p:nvPicPr>
+          <p:cNvPr id="9" name="Picture 8" descr="fig_2_13.png"/>
+          <p:cNvPicPr>
+            <a:picLocks noChangeAspect="1"/>
+          </p:cNvPicPr>
+          <p:nvPr/>
+        </p:nvPicPr>
+        <p:blipFill>
+          <a:blip r:embed="rId2"/>
+          <a:stretch>
+            <a:fillRect/>
+          </a:stretch>
+        </p:blipFill>
+        <p:spPr>
+          <a:xfrm>
+            <a:off x="7132320" y="1417320"/>
+            <a:ext cx="4785055" cy="3999130"/>
+          </a:xfrm>
+          <a:prstGeom prst="rect">
+            <a:avLst/>
+          </a:prstGeom>
+        </p:spPr>
+      </p:pic>
+      <p:sp>
+        <p:nvSpPr>
+          <p:cNvPr id="10" name="Rounded Rectangle 9"/>
+          <p:cNvSpPr/>
+          <p:nvPr/>
+        </p:nvSpPr>
+        <p:spPr>
+          <a:xfrm>
+            <a:off x="10463479" y="457200"/>
+            <a:ext cx="1179576" cy="457200"/>
+          </a:xfrm>
+          <a:prstGeom prst="roundRect">
+            <a:avLst/>
+          </a:prstGeom>
+          <a:solidFill>
+            <a:srgbClr val="166534"/>
+          </a:solidFill>
+          <a:ln>
+            <a:noFill/>
+          </a:ln>
+          <a:effectLst/>
+        </p:spPr>
+        <p:style>
+          <a:lnRef idx="1">
+            <a:schemeClr val="accent1"/>
+          </a:lnRef>
+          <a:fillRef idx="3">
+            <a:schemeClr val="accent1"/>
+          </a:fillRef>
+          <a:effectRef idx="2">
+            <a:schemeClr val="accent1"/>
+          </a:effectRef>
+          <a:fontRef idx="minor">
+            <a:schemeClr val="lt1"/>
+          </a:fontRef>
+        </p:style>
+        <p:txBody>
+          <a:bodyPr rtlCol="0" anchor="ctr" tIns="0" bIns="0"/>
+          <a:lstStyle/>
+          <a:p>
+            <a:pPr algn="ctr"/>
+            <a:r>
+              <a:rPr sz="1400" b="1">
+                <a:solidFill>
+                  <a:srgbClr val="FFFFFF"/>
+                </a:solidFill>
+                <a:latin typeface="Arial"/>
+              </a:rPr>
+              <a:t>LỜI GIẢI</a:t>
             </a:r>
           </a:p>
         </p:txBody>
@@ -5468,7 +5902,7 @@
         <p:spPr>
           <a:xfrm>
             <a:off x="731520" y="274320"/>
-            <a:ext cx="10972800" cy="868680"/>
+            <a:ext cx="9848088" cy="868680"/>
           </a:xfrm>
           <a:prstGeom prst="rect">
             <a:avLst/>
@@ -5488,7 +5922,7 @@
                 </a:solidFill>
                 <a:latin typeface="Arial"/>
               </a:rPr>
-              <a:t>BÀI 2.16 – QUẢNG CÁO HIỆU QUẢ NHẤT</a:t>
+              <a:t>BÀI 2.14</a:t>
             </a:r>
           </a:p>
         </p:txBody>
@@ -5567,7 +6001,7 @@
                 </a:solidFill>
                 <a:latin typeface="Calibri"/>
               </a:rPr>
-              <a:t>Toán 10 · Bài tập cuối chương II          19</a:t>
+              <a:t>Toán 10 · Bài tập cuối chương II          15</a:t>
             </a:r>
           </a:p>
         </p:txBody>
@@ -5581,7 +6015,7 @@
         <p:spPr>
           <a:xfrm>
             <a:off x="731520" y="1508760"/>
-            <a:ext cx="10789920" cy="2834640"/>
+            <a:ext cx="10789920" cy="2267712"/>
           </a:xfrm>
           <a:prstGeom prst="rect">
             <a:avLst/>
@@ -5611,7 +6045,7 @@
                 </a:solidFill>
                 <a:latin typeface="Calibri"/>
               </a:rPr>
-              <a:t>Ngân sách tối đa 160 triệu đồng</a:t>
+              <a:t>Biểu diễn miền nghiệm hệ (SGK)</a:t>
             </a:r>
           </a:p>
           <a:p>
@@ -5632,7 +6066,7 @@
                 </a:solidFill>
                 <a:latin typeface="Calibri"/>
               </a:rPr>
-              <a:t>Phát thanh 80 nghìn/giây, tối đa 900 giây</a:t>
+              <a:t>Tìm GTLN, GTNN của F = −x − y</a:t>
             </a:r>
           </a:p>
           <a:p>
@@ -5653,49 +6087,76 @@
                 </a:solidFill>
                 <a:latin typeface="Calibri"/>
               </a:rPr>
-              <a:t>Truyền hình 400 nghìn/giây, tối đa 360 giây</a:t>
-            </a:r>
-          </a:p>
-          <a:p>
-            <a:pPr algn="l" marL="365760" indent="-365760">
+              <a:t>trên miền nghiệm đó</a:t>
+            </a:r>
+          </a:p>
+          <a:p>
+            <a:pPr algn="l">
               <a:spcAft>
                 <a:spcPts val="1000"/>
               </a:spcAft>
-              <a:buClr>
-                <a:srgbClr val="1E40AF"/>
-              </a:buClr>
-              <a:buFont typeface="Arial"/>
-              <a:buChar char="•"/>
             </a:pPr>
             <a:r>
-              <a:rPr sz="2400">
-                <a:solidFill>
-                  <a:srgbClr val="1E293B"/>
+              <a:rPr sz="2400" b="1">
+                <a:solidFill>
+                  <a:srgbClr val="1E40AF"/>
                 </a:solidFill>
                 <a:latin typeface="Calibri"/>
               </a:rPr>
-              <a:t>Truyền hình hiệu quả gấp 8 lần</a:t>
-            </a:r>
-          </a:p>
-          <a:p>
-            <a:pPr algn="l" marL="365760" indent="-365760">
-              <a:spcAft>
-                <a:spcPts val="1000"/>
-              </a:spcAft>
-              <a:buClr>
-                <a:srgbClr val="1E40AF"/>
-              </a:buClr>
-              <a:buFont typeface="Arial"/>
-              <a:buChar char="•"/>
-            </a:pPr>
-            <a:r>
-              <a:rPr sz="2400">
-                <a:solidFill>
-                  <a:srgbClr val="1E293B"/>
-                </a:solidFill>
-                <a:latin typeface="Calibri"/>
-              </a:rPr>
-              <a:t>Phân bổ thế nào hiệu quả nhất?</a:t>
+              <a:t>Gợi mở: Tính F tại các đỉnh</a:t>
+            </a:r>
+          </a:p>
+        </p:txBody>
+      </p:sp>
+      <p:sp>
+        <p:nvSpPr>
+          <p:cNvPr id="7" name="Rounded Rectangle 6"/>
+          <p:cNvSpPr/>
+          <p:nvPr/>
+        </p:nvSpPr>
+        <p:spPr>
+          <a:xfrm>
+            <a:off x="10701223" y="457200"/>
+            <a:ext cx="941832" cy="457200"/>
+          </a:xfrm>
+          <a:prstGeom prst="roundRect">
+            <a:avLst/>
+          </a:prstGeom>
+          <a:solidFill>
+            <a:srgbClr val="1E40AF"/>
+          </a:solidFill>
+          <a:ln>
+            <a:noFill/>
+          </a:ln>
+          <a:effectLst/>
+        </p:spPr>
+        <p:style>
+          <a:lnRef idx="1">
+            <a:schemeClr val="accent1"/>
+          </a:lnRef>
+          <a:fillRef idx="3">
+            <a:schemeClr val="accent1"/>
+          </a:fillRef>
+          <a:effectRef idx="2">
+            <a:schemeClr val="accent1"/>
+          </a:effectRef>
+          <a:fontRef idx="minor">
+            <a:schemeClr val="lt1"/>
+          </a:fontRef>
+        </p:style>
+        <p:txBody>
+          <a:bodyPr rtlCol="0" anchor="ctr" tIns="0" bIns="0"/>
+          <a:lstStyle/>
+          <a:p>
+            <a:pPr algn="ctr"/>
+            <a:r>
+              <a:rPr sz="1400" b="1">
+                <a:solidFill>
+                  <a:srgbClr val="FFFFFF"/>
+                </a:solidFill>
+                <a:latin typeface="Arial"/>
+              </a:rPr>
+              <a:t>ĐỀ BÀI</a:t>
             </a:r>
           </a:p>
         </p:txBody>
@@ -5779,7 +6240,7 @@
         <p:spPr>
           <a:xfrm>
             <a:off x="731520" y="274320"/>
-            <a:ext cx="10972800" cy="868680"/>
+            <a:ext cx="9610344" cy="868680"/>
           </a:xfrm>
           <a:prstGeom prst="rect">
             <a:avLst/>
@@ -5799,7 +6260,7 @@
                 </a:solidFill>
                 <a:latin typeface="Arial"/>
               </a:rPr>
-              <a:t>TRẠM KIỂM CHỨNG AI</a:t>
+              <a:t>BÀI 2.14</a:t>
             </a:r>
           </a:p>
         </p:txBody>
@@ -5878,7 +6339,7 @@
                 </a:solidFill>
                 <a:latin typeface="Calibri"/>
               </a:rPr>
-              <a:t>Toán 10 · Bài tập cuối chương II          21</a:t>
+              <a:t>Toán 10 · Bài tập cuối chương II          16</a:t>
             </a:r>
           </a:p>
         </p:txBody>
@@ -5891,8 +6352,8 @@
         </p:nvSpPr>
         <p:spPr>
           <a:xfrm>
-            <a:off x="731520" y="1508760"/>
-            <a:ext cx="10789920" cy="2267712"/>
+            <a:off x="731520" y="1463040"/>
+            <a:ext cx="6400800" cy="3017520"/>
           </a:xfrm>
           <a:prstGeom prst="rect">
             <a:avLst/>
@@ -5922,7 +6383,7 @@
                 </a:solidFill>
                 <a:latin typeface="Calibri"/>
               </a:rPr>
-              <a:t>AI trả lời Bài 2.13: vẽ d₁, d₂ nét đứt</a:t>
+              <a:t>Đỉnh: A(−1; 0), B(1; 4), C(5; 4), D(5; −6)</a:t>
             </a:r>
           </a:p>
           <a:p>
@@ -5943,7 +6404,7 @@
                 </a:solidFill>
                 <a:latin typeface="Calibri"/>
               </a:rPr>
-              <a:t>0 ≥ 3 sai, nhưng vẫn giữ phía chứa O</a:t>
+              <a:t>F = −x − y</a:t>
             </a:r>
           </a:p>
           <a:p>
@@ -5964,9 +6425,101 @@
                 </a:solidFill>
                 <a:latin typeface="Calibri"/>
               </a:rPr>
-              <a:t>Điểm (4/3; −1/3) thuộc miền nghiệm</a:t>
-            </a:r>
-          </a:p>
+              <a:t>F(A) = 1; F(B) = −5</a:t>
+            </a:r>
+          </a:p>
+          <a:p>
+            <a:pPr algn="l" marL="365760" indent="-365760">
+              <a:spcAft>
+                <a:spcPts val="1000"/>
+              </a:spcAft>
+              <a:buClr>
+                <a:srgbClr val="1E40AF"/>
+              </a:buClr>
+              <a:buFont typeface="Arial"/>
+              <a:buChar char="•"/>
+            </a:pPr>
+            <a:r>
+              <a:rPr sz="2400">
+                <a:solidFill>
+                  <a:srgbClr val="1E293B"/>
+                </a:solidFill>
+                <a:latin typeface="Calibri"/>
+              </a:rPr>
+              <a:t>F(C) = −9; F(D) = 1</a:t>
+            </a:r>
+          </a:p>
+        </p:txBody>
+      </p:sp>
+      <p:sp>
+        <p:nvSpPr>
+          <p:cNvPr id="7" name="Rounded Rectangle 6"/>
+          <p:cNvSpPr/>
+          <p:nvPr/>
+        </p:nvSpPr>
+        <p:spPr>
+          <a:xfrm>
+            <a:off x="731520" y="4389120"/>
+            <a:ext cx="6035040" cy="1554480"/>
+          </a:xfrm>
+          <a:prstGeom prst="roundRect">
+            <a:avLst>
+              <a:gd name="adj" fmla="val 8000"/>
+            </a:avLst>
+          </a:prstGeom>
+          <a:solidFill>
+            <a:srgbClr val="FEF2F2"/>
+          </a:solidFill>
+          <a:ln w="19050">
+            <a:solidFill>
+              <a:srgbClr val="991B1B"/>
+            </a:solidFill>
+          </a:ln>
+          <a:effectLst/>
+        </p:spPr>
+        <p:style>
+          <a:lnRef idx="1">
+            <a:schemeClr val="accent1"/>
+          </a:lnRef>
+          <a:fillRef idx="3">
+            <a:schemeClr val="accent1"/>
+          </a:fillRef>
+          <a:effectRef idx="2">
+            <a:schemeClr val="accent1"/>
+          </a:effectRef>
+          <a:fontRef idx="minor">
+            <a:schemeClr val="lt1"/>
+          </a:fontRef>
+        </p:style>
+        <p:txBody>
+          <a:bodyPr rtlCol="0" anchor="ctr"/>
+          <a:lstStyle/>
+          <a:p>
+            <a:pPr algn="ctr"/>
+          </a:p>
+        </p:txBody>
+      </p:sp>
+      <p:sp>
+        <p:nvSpPr>
+          <p:cNvPr id="8" name="TextBox 7"/>
+          <p:cNvSpPr txBox="1"/>
+          <p:nvPr/>
+        </p:nvSpPr>
+        <p:spPr>
+          <a:xfrm>
+            <a:off x="914400" y="4480560"/>
+            <a:ext cx="5669280" cy="1371600"/>
+          </a:xfrm>
+          <a:prstGeom prst="rect">
+            <a:avLst/>
+          </a:prstGeom>
+          <a:noFill/>
+        </p:spPr>
+        <p:txBody>
+          <a:bodyPr wrap="square" anchor="ctr">
+            <a:spAutoFit/>
+          </a:bodyPr>
+          <a:lstStyle/>
           <a:p>
             <a:pPr algn="l">
               <a:spcAft>
@@ -5976,11 +6529,104 @@
             <a:r>
               <a:rPr sz="2400" b="1">
                 <a:solidFill>
-                  <a:srgbClr val="1E40AF"/>
+                  <a:srgbClr val="991B1B"/>
                 </a:solidFill>
                 <a:latin typeface="Calibri"/>
               </a:rPr>
-              <a:t>Gợi mở: Tìm bước sai, giải thích, sửa lại</a:t>
+              <a:t>max F = 1 (trên cạnh AD)</a:t>
+            </a:r>
+          </a:p>
+          <a:p>
+            <a:pPr algn="l">
+              <a:spcAft>
+                <a:spcPts val="1000"/>
+              </a:spcAft>
+            </a:pPr>
+            <a:r>
+              <a:rPr sz="2400" b="1">
+                <a:solidFill>
+                  <a:srgbClr val="991B1B"/>
+                </a:solidFill>
+                <a:latin typeface="Calibri"/>
+              </a:rPr>
+              <a:t>min F = −9 tại C(5; 4)</a:t>
+            </a:r>
+          </a:p>
+        </p:txBody>
+      </p:sp>
+      <p:pic>
+        <p:nvPicPr>
+          <p:cNvPr id="9" name="Picture 8" descr="fig_2_14.png"/>
+          <p:cNvPicPr>
+            <a:picLocks noChangeAspect="1"/>
+          </p:cNvPicPr>
+          <p:nvPr/>
+        </p:nvPicPr>
+        <p:blipFill>
+          <a:blip r:embed="rId2"/>
+          <a:stretch>
+            <a:fillRect/>
+          </a:stretch>
+        </p:blipFill>
+        <p:spPr>
+          <a:xfrm>
+            <a:off x="7406640" y="1371600"/>
+            <a:ext cx="4677063" cy="4892040"/>
+          </a:xfrm>
+          <a:prstGeom prst="rect">
+            <a:avLst/>
+          </a:prstGeom>
+        </p:spPr>
+      </p:pic>
+      <p:sp>
+        <p:nvSpPr>
+          <p:cNvPr id="10" name="Rounded Rectangle 9"/>
+          <p:cNvSpPr/>
+          <p:nvPr/>
+        </p:nvSpPr>
+        <p:spPr>
+          <a:xfrm>
+            <a:off x="10463479" y="457200"/>
+            <a:ext cx="1179576" cy="457200"/>
+          </a:xfrm>
+          <a:prstGeom prst="roundRect">
+            <a:avLst/>
+          </a:prstGeom>
+          <a:solidFill>
+            <a:srgbClr val="166534"/>
+          </a:solidFill>
+          <a:ln>
+            <a:noFill/>
+          </a:ln>
+          <a:effectLst/>
+        </p:spPr>
+        <p:style>
+          <a:lnRef idx="1">
+            <a:schemeClr val="accent1"/>
+          </a:lnRef>
+          <a:fillRef idx="3">
+            <a:schemeClr val="accent1"/>
+          </a:fillRef>
+          <a:effectRef idx="2">
+            <a:schemeClr val="accent1"/>
+          </a:effectRef>
+          <a:fontRef idx="minor">
+            <a:schemeClr val="lt1"/>
+          </a:fontRef>
+        </p:style>
+        <p:txBody>
+          <a:bodyPr rtlCol="0" anchor="ctr" tIns="0" bIns="0"/>
+          <a:lstStyle/>
+          <a:p>
+            <a:pPr algn="ctr"/>
+            <a:r>
+              <a:rPr sz="1400" b="1">
+                <a:solidFill>
+                  <a:srgbClr val="FFFFFF"/>
+                </a:solidFill>
+                <a:latin typeface="Arial"/>
+              </a:rPr>
+              <a:t>LỜI GIẢI</a:t>
             </a:r>
           </a:p>
         </p:txBody>
@@ -6064,7 +6710,7 @@
         <p:spPr>
           <a:xfrm>
             <a:off x="731520" y="274320"/>
-            <a:ext cx="10972800" cy="868680"/>
+            <a:ext cx="9848088" cy="868680"/>
           </a:xfrm>
           <a:prstGeom prst="rect">
             <a:avLst/>
@@ -6084,7 +6730,7 @@
                 </a:solidFill>
                 <a:latin typeface="Arial"/>
               </a:rPr>
-              <a:t>NHIỆM VỤ VỀ NHÀ</a:t>
+              <a:t>BÀI 2.15 – ĐẦU TƯ TRÁI PHIẾU</a:t>
             </a:r>
           </a:p>
         </p:txBody>
@@ -6163,7 +6809,7 @@
                 </a:solidFill>
                 <a:latin typeface="Calibri"/>
               </a:rPr>
-              <a:t>Toán 10 · Bài tập cuối chương II          23</a:t>
+              <a:t>Toán 10 · Bài tập cuối chương II          17</a:t>
             </a:r>
           </a:p>
         </p:txBody>
@@ -6176,8 +6822,8 @@
         </p:nvSpPr>
         <p:spPr>
           <a:xfrm>
-            <a:off x="731520" y="1554480"/>
-            <a:ext cx="10515600" cy="4572000"/>
+            <a:off x="731520" y="1508760"/>
+            <a:ext cx="10789920" cy="2834640"/>
           </a:xfrm>
           <a:prstGeom prst="rect">
             <a:avLst/>
@@ -6201,13 +6847,13 @@
               <a:buChar char="•"/>
             </a:pPr>
             <a:r>
-              <a:rPr sz="2600">
+              <a:rPr sz="2400">
                 <a:solidFill>
                   <a:srgbClr val="1E293B"/>
                 </a:solidFill>
                 <a:latin typeface="Calibri"/>
               </a:rPr>
-              <a:t>Hoàn thiện Bài 2.15 (nếu chưa xong)</a:t>
+              <a:t>Đầu tư 1 200 triệu vào 3 loại trái phiếu</a:t>
             </a:r>
           </a:p>
           <a:p>
@@ -6222,13 +6868,13 @@
               <a:buChar char="•"/>
             </a:pPr>
             <a:r>
-              <a:rPr sz="2600">
+              <a:rPr sz="2400">
                 <a:solidFill>
                   <a:srgbClr val="1E293B"/>
                 </a:solidFill>
                 <a:latin typeface="Calibri"/>
               </a:rPr>
-              <a:t>Tìm số liệu thật ở Gia Lai</a:t>
+              <a:t>Lãi: chính phủ 7%, ngân hàng 8%, DN 12%</a:t>
             </a:r>
           </a:p>
           <a:p>
@@ -6243,13 +6889,13 @@
               <a:buChar char="•"/>
             </a:pPr>
             <a:r>
-              <a:rPr sz="2600">
+              <a:rPr sz="2400">
                 <a:solidFill>
                   <a:srgbClr val="1E293B"/>
                 </a:solidFill>
                 <a:latin typeface="Calibri"/>
               </a:rPr>
-              <a:t>Tự đặt bài toán tối ưu (≥ 3 BPT)</a:t>
+              <a:t>Chính phủ ≥ 3 lần ngân hàng</a:t>
             </a:r>
           </a:p>
           <a:p>
@@ -6264,13 +6910,13 @@
               <a:buChar char="•"/>
             </a:pPr>
             <a:r>
-              <a:rPr sz="2600">
+              <a:rPr sz="2400">
                 <a:solidFill>
                   <a:srgbClr val="1E293B"/>
                 </a:solidFill>
                 <a:latin typeface="Calibri"/>
               </a:rPr>
-              <a:t>Kiểm tra miền nghiệm bằng GeoGebra</a:t>
+              <a:t>Doanh nghiệp tối đa 200 triệu</a:t>
             </a:r>
           </a:p>
           <a:p>
@@ -6285,34 +6931,66 @@
               <a:buChar char="•"/>
             </a:pPr>
             <a:r>
-              <a:rPr sz="2600">
+              <a:rPr sz="2400">
                 <a:solidFill>
                   <a:srgbClr val="1E293B"/>
                 </a:solidFill>
                 <a:latin typeface="Calibri"/>
               </a:rPr>
-              <a:t>Ghi Nhật ký AI, nộp sau 1 tuần</a:t>
-            </a:r>
-          </a:p>
-          <a:p>
-            <a:pPr algn="l" marL="365760" indent="-365760">
-              <a:spcAft>
-                <a:spcPts val="1000"/>
-              </a:spcAft>
-              <a:buClr>
-                <a:srgbClr val="1E40AF"/>
-              </a:buClr>
-              <a:buFont typeface="Arial"/>
-              <a:buChar char="•"/>
-            </a:pPr>
-            <a:r>
-              <a:rPr sz="2600">
-                <a:solidFill>
-                  <a:srgbClr val="1E293B"/>
-                </a:solidFill>
-                <a:latin typeface="Calibri"/>
-              </a:rPr>
-              <a:t>Đọc trước Bài 5 (Chương III)</a:t>
+              <a:t>Đầu tư thế nào lãi lớn nhất?</a:t>
+            </a:r>
+          </a:p>
+        </p:txBody>
+      </p:sp>
+      <p:sp>
+        <p:nvSpPr>
+          <p:cNvPr id="7" name="Rounded Rectangle 6"/>
+          <p:cNvSpPr/>
+          <p:nvPr/>
+        </p:nvSpPr>
+        <p:spPr>
+          <a:xfrm>
+            <a:off x="10701223" y="457200"/>
+            <a:ext cx="941832" cy="457200"/>
+          </a:xfrm>
+          <a:prstGeom prst="roundRect">
+            <a:avLst/>
+          </a:prstGeom>
+          <a:solidFill>
+            <a:srgbClr val="1E40AF"/>
+          </a:solidFill>
+          <a:ln>
+            <a:noFill/>
+          </a:ln>
+          <a:effectLst/>
+        </p:spPr>
+        <p:style>
+          <a:lnRef idx="1">
+            <a:schemeClr val="accent1"/>
+          </a:lnRef>
+          <a:fillRef idx="3">
+            <a:schemeClr val="accent1"/>
+          </a:fillRef>
+          <a:effectRef idx="2">
+            <a:schemeClr val="accent1"/>
+          </a:effectRef>
+          <a:fontRef idx="minor">
+            <a:schemeClr val="lt1"/>
+          </a:fontRef>
+        </p:style>
+        <p:txBody>
+          <a:bodyPr rtlCol="0" anchor="ctr" tIns="0" bIns="0"/>
+          <a:lstStyle/>
+          <a:p>
+            <a:pPr algn="ctr"/>
+            <a:r>
+              <a:rPr sz="1400" b="1">
+                <a:solidFill>
+                  <a:srgbClr val="FFFFFF"/>
+                </a:solidFill>
+                <a:latin typeface="Arial"/>
+              </a:rPr>
+              <a:t>ĐỀ BÀI</a:t>
             </a:r>
           </a:p>
         </p:txBody>
@@ -6396,7 +7074,7 @@
         <p:spPr>
           <a:xfrm>
             <a:off x="731520" y="274320"/>
-            <a:ext cx="10972800" cy="868680"/>
+            <a:ext cx="9610344" cy="868680"/>
           </a:xfrm>
           <a:prstGeom prst="rect">
             <a:avLst/>
@@ -6416,7 +7094,7 @@
                 </a:solidFill>
                 <a:latin typeface="Arial"/>
               </a:rPr>
-              <a:t>BÀI TẬP CỦA BẠN</a:t>
+              <a:t>BÀI 2.15 – ĐẦU TƯ TRÁI PHIẾU</a:t>
             </a:r>
           </a:p>
         </p:txBody>
@@ -6495,31 +7173,33 @@
                 </a:solidFill>
                 <a:latin typeface="Calibri"/>
               </a:rPr>
-              <a:t>Toán 10 · Bài tập cuối chương II          24</a:t>
-            </a:r>
-          </a:p>
-        </p:txBody>
-      </p:sp>
-      <p:sp>
-        <p:nvSpPr>
-          <p:cNvPr id="6" name="Rectangle 5"/>
+              <a:t>Toán 10 · Bài tập cuối chương II          18</a:t>
+            </a:r>
+          </a:p>
+        </p:txBody>
+      </p:sp>
+      <p:sp>
+        <p:nvSpPr>
+          <p:cNvPr id="7" name="Rounded Rectangle 6"/>
           <p:cNvSpPr/>
           <p:nvPr/>
         </p:nvSpPr>
         <p:spPr>
           <a:xfrm>
-            <a:off x="731520" y="1463040"/>
-            <a:ext cx="4572000" cy="4572000"/>
-          </a:xfrm>
-          <a:prstGeom prst="rect">
-            <a:avLst/>
+            <a:off x="731520" y="4526280"/>
+            <a:ext cx="6217920" cy="1645920"/>
+          </a:xfrm>
+          <a:prstGeom prst="roundRect">
+            <a:avLst>
+              <a:gd name="adj" fmla="val 8000"/>
+            </a:avLst>
           </a:prstGeom>
           <a:solidFill>
-            <a:srgbClr val="F8FAFC"/>
+            <a:srgbClr val="FEF2F2"/>
           </a:solidFill>
           <a:ln w="19050">
             <a:solidFill>
-              <a:srgbClr val="E2E8F0"/>
+              <a:srgbClr val="991B1B"/>
             </a:solidFill>
           </a:ln>
           <a:effectLst/>
@@ -6546,9 +7226,64 @@
           </a:p>
         </p:txBody>
       </p:sp>
+      <p:sp>
+        <p:nvSpPr>
+          <p:cNvPr id="8" name="TextBox 7"/>
+          <p:cNvSpPr txBox="1"/>
+          <p:nvPr/>
+        </p:nvSpPr>
+        <p:spPr>
+          <a:xfrm>
+            <a:off x="914400" y="4617720"/>
+            <a:ext cx="5852160" cy="1463040"/>
+          </a:xfrm>
+          <a:prstGeom prst="rect">
+            <a:avLst/>
+          </a:prstGeom>
+          <a:noFill/>
+        </p:spPr>
+        <p:txBody>
+          <a:bodyPr wrap="square" anchor="ctr">
+            <a:spAutoFit/>
+          </a:bodyPr>
+          <a:lstStyle/>
+          <a:p>
+            <a:pPr algn="l">
+              <a:spcAft>
+                <a:spcPts val="1000"/>
+              </a:spcAft>
+            </a:pPr>
+            <a:r>
+              <a:rPr sz="2400" b="1">
+                <a:solidFill>
+                  <a:srgbClr val="991B1B"/>
+                </a:solidFill>
+                <a:latin typeface="Calibri"/>
+              </a:rPr>
+              <a:t>Đầu tư 750 – 250 – 200 (triệu)</a:t>
+            </a:r>
+          </a:p>
+          <a:p>
+            <a:pPr algn="l">
+              <a:spcAft>
+                <a:spcPts val="1000"/>
+              </a:spcAft>
+            </a:pPr>
+            <a:r>
+              <a:rPr sz="2400" b="1">
+                <a:solidFill>
+                  <a:srgbClr val="991B1B"/>
+                </a:solidFill>
+                <a:latin typeface="Calibri"/>
+              </a:rPr>
+              <a:t>Lợi nhuận lớn nhất: 96,5 triệu</a:t>
+            </a:r>
+          </a:p>
+        </p:txBody>
+      </p:sp>
       <p:pic>
         <p:nvPicPr>
-          <p:cNvPr id="7" name="Picture 6" descr="QR_CungCo_Chuong2_Toan10.png"/>
+          <p:cNvPr id="9" name="Picture 8" descr="fig_2_15.png"/>
           <p:cNvPicPr>
             <a:picLocks noChangeAspect="1"/>
           </p:cNvPicPr>
@@ -6562,157 +7297,366 @@
         </p:blipFill>
         <p:spPr>
           <a:xfrm>
-            <a:off x="960120" y="1691640"/>
-            <a:ext cx="4114800" cy="4114800"/>
+            <a:off x="7223760" y="1463040"/>
+            <a:ext cx="4572000" cy="3693149"/>
           </a:xfrm>
           <a:prstGeom prst="rect">
             <a:avLst/>
           </a:prstGeom>
         </p:spPr>
       </p:pic>
-      <p:sp>
-        <p:nvSpPr>
-          <p:cNvPr id="8" name="TextBox 7"/>
-          <p:cNvSpPr txBox="1"/>
-          <p:nvPr/>
-        </p:nvSpPr>
-        <p:spPr>
-          <a:xfrm>
-            <a:off x="5760720" y="1554480"/>
-            <a:ext cx="6035040" cy="3108960"/>
-          </a:xfrm>
-          <a:prstGeom prst="rect">
-            <a:avLst/>
-          </a:prstGeom>
-          <a:noFill/>
-        </p:spPr>
-        <p:txBody>
-          <a:bodyPr wrap="square" anchor="t">
-            <a:spAutoFit/>
-          </a:bodyPr>
-          <a:lstStyle/>
-          <a:p>
-            <a:pPr algn="l" marL="365760" indent="-365760">
-              <a:spcAft>
-                <a:spcPts val="1000"/>
-              </a:spcAft>
-              <a:buClr>
-                <a:srgbClr val="1E40AF"/>
-              </a:buClr>
-              <a:buFont typeface="Arial"/>
-              <a:buChar char="•"/>
-            </a:pPr>
-            <a:r>
-              <a:rPr sz="2600">
-                <a:solidFill>
-                  <a:srgbClr val="1E293B"/>
-                </a:solidFill>
-                <a:latin typeface="Calibri"/>
-              </a:rPr>
-              <a:t>Quét mã QR bằng điện thoại</a:t>
-            </a:r>
-          </a:p>
-          <a:p>
-            <a:pPr algn="l" marL="365760" indent="-365760">
-              <a:spcAft>
-                <a:spcPts val="1000"/>
-              </a:spcAft>
-              <a:buClr>
-                <a:srgbClr val="1E40AF"/>
-              </a:buClr>
-              <a:buFont typeface="Arial"/>
-              <a:buChar char="•"/>
-            </a:pPr>
-            <a:r>
-              <a:rPr sz="2600">
-                <a:solidFill>
-                  <a:srgbClr val="1E293B"/>
-                </a:solidFill>
-                <a:latin typeface="Calibri"/>
-              </a:rPr>
-              <a:t>Nhập họ tên và lớp</a:t>
-            </a:r>
-          </a:p>
-          <a:p>
-            <a:pPr algn="l" marL="365760" indent="-365760">
-              <a:spcAft>
-                <a:spcPts val="1000"/>
-              </a:spcAft>
-              <a:buClr>
-                <a:srgbClr val="1E40AF"/>
-              </a:buClr>
-              <a:buFont typeface="Arial"/>
-              <a:buChar char="•"/>
-            </a:pPr>
-            <a:r>
-              <a:rPr sz="2600">
-                <a:solidFill>
-                  <a:srgbClr val="1E293B"/>
-                </a:solidFill>
-                <a:latin typeface="Calibri"/>
-              </a:rPr>
-              <a:t>7 câu – làm trong 7 phút</a:t>
-            </a:r>
-          </a:p>
-          <a:p>
-            <a:pPr algn="l" marL="365760" indent="-365760">
-              <a:spcAft>
-                <a:spcPts val="1000"/>
-              </a:spcAft>
-              <a:buClr>
-                <a:srgbClr val="1E40AF"/>
-              </a:buClr>
-              <a:buFont typeface="Arial"/>
-              <a:buChar char="•"/>
-            </a:pPr>
-            <a:r>
-              <a:rPr sz="2600">
-                <a:solidFill>
-                  <a:srgbClr val="1E293B"/>
-                </a:solidFill>
-                <a:latin typeface="Calibri"/>
-              </a:rPr>
-              <a:t>Nộp bài, xem lời giải</a:t>
-            </a:r>
-          </a:p>
-        </p:txBody>
-      </p:sp>
-      <p:sp>
-        <p:nvSpPr>
-          <p:cNvPr id="9" name="TextBox 8"/>
-          <p:cNvSpPr txBox="1"/>
-          <p:nvPr/>
-        </p:nvSpPr>
-        <p:spPr>
-          <a:xfrm>
-            <a:off x="5760720" y="4754880"/>
-            <a:ext cx="6035040" cy="1188720"/>
-          </a:xfrm>
-          <a:prstGeom prst="rect">
-            <a:avLst/>
-          </a:prstGeom>
-          <a:noFill/>
-        </p:spPr>
-        <p:txBody>
-          <a:bodyPr wrap="square" anchor="t">
-            <a:spAutoFit/>
-          </a:bodyPr>
-          <a:lstStyle/>
-          <a:p>
-            <a:pPr algn="l">
-              <a:spcAft>
-                <a:spcPts val="1000"/>
-              </a:spcAft>
-            </a:pPr>
-            <a:r>
-              <a:rPr sz="1800" b="1">
-                <a:solidFill>
-                  <a:srgbClr val="1E40AF"/>
-                </a:solidFill>
-                <a:latin typeface="Calibri"/>
-                <a:hlinkClick r:id="rId3"/>
-              </a:rPr>
-              <a:t>trangtu66.github.io/Taode_thi_online/cc_chuong2_t10.html</a:t>
+      <mc:AlternateContent xmlns:mc="http://schemas.openxmlformats.org/markup-compatibility/2006">
+        <mc:Choice xmlns:a14="http://schemas.microsoft.com/office/drawing/2010/main" Requires="a14">
+          <p:sp>
+            <p:nvSpPr>
+              <p:cNvPr id="10" name="TextBox 9"/>
+              <p:cNvSpPr txBox="1"/>
+              <p:nvPr/>
+            </p:nvSpPr>
+            <p:spPr>
+              <a:xfrm>
+                <a:off x="731520" y="1463040"/>
+                <a:ext cx="6400800" cy="2880360"/>
+              </a:xfrm>
+              <a:prstGeom prst="rect">
+                <a:avLst/>
+              </a:prstGeom>
+              <a:noFill/>
+            </p:spPr>
+            <p:txBody>
+              <a:bodyPr wrap="square">
+                <a:spAutoFit/>
+              </a:bodyPr>
+              <a:lstStyle/>
+              <a:p>
+                <a:pPr marL="365760" indent="-365760">
+                  <a:spcAft>
+                    <a:spcPts val="800"/>
+                  </a:spcAft>
+                  <a:buClr>
+                    <a:srgbClr val="1E40AF"/>
+                  </a:buClr>
+                  <a:buFont typeface="Arial"/>
+                  <a:buChar char="•"/>
+                </a:pPr>
+                <a:r>
+                  <a:rPr sz="2200" b="0">
+                    <a:solidFill>
+                      <a:srgbClr val="1E293B"/>
+                    </a:solidFill>
+                    <a:latin typeface="Calibri"/>
+                  </a:rPr>
+                  <a:t>x: chính phủ, y: ngân hàng (triệu đồng)</a:t>
+                </a:r>
+              </a:p>
+              <a:p>
+                <a:pPr marL="365760" indent="-365760">
+                  <a:spcAft>
+                    <a:spcPts val="800"/>
+                  </a:spcAft>
+                  <a:buClr>
+                    <a:srgbClr val="1E40AF"/>
+                  </a:buClr>
+                  <a:buFont typeface="Arial"/>
+                  <a:buChar char="•"/>
+                </a:pPr>
+                <a:r>
+                  <a:rPr sz="2200" b="0">
+                    <a:solidFill>
+                      <a:srgbClr val="1E293B"/>
+                    </a:solidFill>
+                    <a:latin typeface="Calibri"/>
+                  </a:rPr>
+                  <a:t>Doanh nghiệp: 1200 − x − y (triệu đồng)</a:t>
+                </a:r>
+              </a:p>
+              <a:p>
+                <a:pPr marL="365760" indent="-365760">
+                  <a:spcAft>
+                    <a:spcPts val="200"/>
+                  </a:spcAft>
+                  <a:buClr>
+                    <a:srgbClr val="1E40AF"/>
+                  </a:buClr>
+                  <a:buFont typeface="Arial"/>
+                  <a:buChar char="•"/>
+                </a:pPr>
+                <a:r>
+                  <a:rPr sz="2200" b="0">
+                    <a:solidFill>
+                      <a:srgbClr val="1E293B"/>
+                    </a:solidFill>
+                    <a:latin typeface="Calibri"/>
+                  </a:rPr>
+                  <a:t>Ta có hệ bất phương trình:</a:t>
+                </a:r>
+              </a:p>
+              <a:p xmlns:m="http://schemas.openxmlformats.org/officeDocument/2006/math">
+                <a:pPr marL="457200" indent="0">
+                  <a:spcBef>
+                    <a:spcPts val="200"/>
+                  </a:spcBef>
+                  <a:spcAft>
+                    <a:spcPts val="800"/>
+                  </a:spcAft>
+                  <a:buNone/>
+                </a:pPr>
+                <a14:m>
+                  <m:oMathPara>
+                    <m:oMathParaPr>
+                      <m:jc m:val="left"/>
+                    </m:oMathParaPr>
+                    <m:oMath>
+                      <m:d>
+                        <m:dPr>
+                          <m:begChr m:val="{"/>
+                          <m:endChr m:val=""/>
+                        </m:dPr>
+                        <m:e>
+                          <m:eqArr>
+                            <m:e>
+                              <m:r>
+                                <a:rPr lang="vi-VN" sz="2400" b="0">
+                                  <a:solidFill>
+                                    <a:srgbClr val="1E293B"/>
+                                  </a:solidFill>
+                                  <a:latin typeface="Cambria Math" panose="02040503050406030204" pitchFamily="18" charset="0"/>
+                                  <a:cs typeface="Cambria Math"/>
+                                </a:rPr>
+                                <m:t>&amp;x≥3y</m:t>
+                              </m:r>
+                            </m:e>
+                            <m:e>
+                              <m:r>
+                                <a:rPr lang="vi-VN" sz="2400" b="0">
+                                  <a:solidFill>
+                                    <a:srgbClr val="1E293B"/>
+                                  </a:solidFill>
+                                  <a:latin typeface="Cambria Math" panose="02040503050406030204" pitchFamily="18" charset="0"/>
+                                  <a:cs typeface="Cambria Math"/>
+                                </a:rPr>
+                                <m:t>&amp;1000≤x+y≤1200</m:t>
+                              </m:r>
+                            </m:e>
+                            <m:e>
+                              <m:r>
+                                <a:rPr lang="vi-VN" sz="2400" b="0">
+                                  <a:solidFill>
+                                    <a:srgbClr val="1E293B"/>
+                                  </a:solidFill>
+                                  <a:latin typeface="Cambria Math" panose="02040503050406030204" pitchFamily="18" charset="0"/>
+                                  <a:cs typeface="Cambria Math"/>
+                                </a:rPr>
+                                <m:t>&amp;y≥0</m:t>
+                              </m:r>
+                            </m:e>
+                          </m:eqArr>
+                        </m:e>
+                      </m:d>
+                    </m:oMath>
+                  </m:oMathPara>
+                </a14:m>
+                <a:endParaRPr lang="vi-VN" sz="2400"/>
+              </a:p>
+              <a:p>
+                <a:pPr marL="365760" indent="-365760">
+                  <a:spcAft>
+                    <a:spcPts val="800"/>
+                  </a:spcAft>
+                  <a:buClr>
+                    <a:srgbClr val="1E40AF"/>
+                  </a:buClr>
+                  <a:buFont typeface="Arial"/>
+                  <a:buChar char="•"/>
+                </a:pPr>
+                <a:r>
+                  <a:rPr sz="2200" b="0">
+                    <a:solidFill>
+                      <a:srgbClr val="1E293B"/>
+                    </a:solidFill>
+                    <a:latin typeface="Calibri"/>
+                  </a:rPr>
+                  <a:t>Lợi nhuận: L = 144 − 0,05x − 0,04y</a:t>
+                </a:r>
+              </a:p>
+            </p:txBody>
+          </p:sp>
+        </mc:Choice>
+        <mc:Fallback>
+          <p:sp>
+            <p:nvSpPr>
+              <p:cNvPr id="10" name="TextBox 9"/>
+              <p:cNvSpPr txBox="1"/>
+              <p:nvPr/>
+            </p:nvSpPr>
+            <p:spPr>
+              <a:xfrm>
+                <a:off x="731520" y="1463040"/>
+                <a:ext cx="6400800" cy="2880360"/>
+              </a:xfrm>
+              <a:prstGeom prst="rect">
+                <a:avLst/>
+              </a:prstGeom>
+              <a:noFill/>
+            </p:spPr>
+            <p:txBody>
+              <a:bodyPr wrap="square">
+                <a:spAutoFit/>
+              </a:bodyPr>
+              <a:lstStyle/>
+              <a:p>
+                <a:pPr marL="365760" indent="-365760">
+                  <a:spcAft>
+                    <a:spcPts val="800"/>
+                  </a:spcAft>
+                  <a:buClr>
+                    <a:srgbClr val="1E40AF"/>
+                  </a:buClr>
+                  <a:buFont typeface="Arial"/>
+                  <a:buChar char="•"/>
+                </a:pPr>
+                <a:r>
+                  <a:rPr sz="2200" b="0">
+                    <a:solidFill>
+                      <a:srgbClr val="1E293B"/>
+                    </a:solidFill>
+                    <a:latin typeface="Calibri"/>
+                  </a:rPr>
+                  <a:t>x: chính phủ, y: ngân hàng (triệu đồng)</a:t>
+                </a:r>
+              </a:p>
+              <a:p>
+                <a:pPr marL="365760" indent="-365760">
+                  <a:spcAft>
+                    <a:spcPts val="800"/>
+                  </a:spcAft>
+                  <a:buClr>
+                    <a:srgbClr val="1E40AF"/>
+                  </a:buClr>
+                  <a:buFont typeface="Arial"/>
+                  <a:buChar char="•"/>
+                </a:pPr>
+                <a:r>
+                  <a:rPr sz="2200" b="0">
+                    <a:solidFill>
+                      <a:srgbClr val="1E293B"/>
+                    </a:solidFill>
+                    <a:latin typeface="Calibri"/>
+                  </a:rPr>
+                  <a:t>Doanh nghiệp: 1200 − x − y (triệu đồng)</a:t>
+                </a:r>
+              </a:p>
+              <a:p>
+                <a:pPr marL="365760" indent="-365760">
+                  <a:spcAft>
+                    <a:spcPts val="200"/>
+                  </a:spcAft>
+                  <a:buClr>
+                    <a:srgbClr val="1E40AF"/>
+                  </a:buClr>
+                  <a:buFont typeface="Arial"/>
+                  <a:buChar char="•"/>
+                </a:pPr>
+                <a:r>
+                  <a:rPr sz="2200" b="0">
+                    <a:solidFill>
+                      <a:srgbClr val="1E293B"/>
+                    </a:solidFill>
+                    <a:latin typeface="Calibri"/>
+                  </a:rPr>
+                  <a:t>Ta có hệ bất phương trình:</a:t>
+                </a:r>
+              </a:p>
+              <a:p xmlns:a14="http://schemas.microsoft.com/office/drawing/2010/main" xmlns:m="http://schemas.openxmlformats.org/officeDocument/2006/math">
+                <a:pPr marL="457200" indent="0">
+                  <a:spcBef>
+                    <a:spcPts val="200"/>
+                  </a:spcBef>
+                  <a:spcAft>
+                    <a:spcPts val="800"/>
+                  </a:spcAft>
+                  <a:buNone/>
+                </a:pPr>
+                <a:r>
+                  <a:rPr lang="vi-VN"/>
+                  <a:t>{ x≥3y ; 1000≤x+y≤1200 ; y≥0</a:t>
+                </a:r>
+                <a:endParaRPr lang="vi-VN" sz="2400"/>
+              </a:p>
+              <a:p>
+                <a:pPr marL="365760" indent="-365760">
+                  <a:spcAft>
+                    <a:spcPts val="800"/>
+                  </a:spcAft>
+                  <a:buClr>
+                    <a:srgbClr val="1E40AF"/>
+                  </a:buClr>
+                  <a:buFont typeface="Arial"/>
+                  <a:buChar char="•"/>
+                </a:pPr>
+                <a:r>
+                  <a:rPr sz="2200" b="0">
+                    <a:solidFill>
+                      <a:srgbClr val="1E293B"/>
+                    </a:solidFill>
+                    <a:latin typeface="Calibri"/>
+                  </a:rPr>
+                  <a:t>Lợi nhuận: L = 144 − 0,05x − 0,04y</a:t>
+                </a:r>
+              </a:p>
+            </p:txBody>
+          </p:sp>
+        </mc:Fallback>
+      </mc:AlternateContent>
+      <p:sp>
+        <p:nvSpPr>
+          <p:cNvPr id="11" name="Rounded Rectangle 10"/>
+          <p:cNvSpPr/>
+          <p:nvPr/>
+        </p:nvSpPr>
+        <p:spPr>
+          <a:xfrm>
+            <a:off x="10463479" y="457200"/>
+            <a:ext cx="1179576" cy="457200"/>
+          </a:xfrm>
+          <a:prstGeom prst="roundRect">
+            <a:avLst/>
+          </a:prstGeom>
+          <a:solidFill>
+            <a:srgbClr val="166534"/>
+          </a:solidFill>
+          <a:ln>
+            <a:noFill/>
+          </a:ln>
+          <a:effectLst/>
+        </p:spPr>
+        <p:style>
+          <a:lnRef idx="1">
+            <a:schemeClr val="accent1"/>
+          </a:lnRef>
+          <a:fillRef idx="3">
+            <a:schemeClr val="accent1"/>
+          </a:fillRef>
+          <a:effectRef idx="2">
+            <a:schemeClr val="accent1"/>
+          </a:effectRef>
+          <a:fontRef idx="minor">
+            <a:schemeClr val="lt1"/>
+          </a:fontRef>
+        </p:style>
+        <p:txBody>
+          <a:bodyPr rtlCol="0" anchor="ctr" tIns="0" bIns="0"/>
+          <a:lstStyle/>
+          <a:p>
+            <a:pPr algn="ctr"/>
+            <a:r>
+              <a:rPr sz="1400" b="1">
+                <a:solidFill>
+                  <a:srgbClr val="FFFFFF"/>
+                </a:solidFill>
+                <a:latin typeface="Arial"/>
+              </a:rPr>
+              <a:t>LỜI GIẢI</a:t>
             </a:r>
           </a:p>
         </p:txBody>
@@ -6796,7 +7740,7 @@
         <p:spPr>
           <a:xfrm>
             <a:off x="731520" y="274320"/>
-            <a:ext cx="10972800" cy="868680"/>
+            <a:ext cx="9848088" cy="868680"/>
           </a:xfrm>
           <a:prstGeom prst="rect">
             <a:avLst/>
@@ -6816,7 +7760,7 @@
                 </a:solidFill>
                 <a:latin typeface="Arial"/>
               </a:rPr>
-              <a:t>TRẠM KIỂM CHỨNG AI – LỜI GIẢI</a:t>
+              <a:t>BÀI 2.16 – QUẢNG CÁO HIỆU QUẢ NHẤT</a:t>
             </a:r>
           </a:p>
         </p:txBody>
@@ -6895,7 +7839,7 @@
                 </a:solidFill>
                 <a:latin typeface="Calibri"/>
               </a:rPr>
-              <a:t>Toán 10 · Bài tập cuối chương II          22</a:t>
+              <a:t>Toán 10 · Bài tập cuối chương II          19</a:t>
             </a:r>
           </a:p>
         </p:txBody>
@@ -6909,7 +7853,7 @@
         <p:spPr>
           <a:xfrm>
             <a:off x="731520" y="1508760"/>
-            <a:ext cx="10789920" cy="1700784"/>
+            <a:ext cx="10789920" cy="2834640"/>
           </a:xfrm>
           <a:prstGeom prst="rect">
             <a:avLst/>
@@ -6939,7 +7883,7 @@
                 </a:solidFill>
                 <a:latin typeface="Calibri"/>
               </a:rPr>
-              <a:t>Lỗi 1: d₂ (2x − y ≥ 3) phải nét liền</a:t>
+              <a:t>Ngân sách tối đa 160 triệu đồng</a:t>
             </a:r>
           </a:p>
           <a:p>
@@ -6960,7 +7904,7 @@
                 </a:solidFill>
                 <a:latin typeface="Calibri"/>
               </a:rPr>
-              <a:t>Lỗi 2: O không thỏa mãn ⇒ bỏ phía chứa O</a:t>
+              <a:t>Phát thanh 80 nghìn/giây, tối đa 900 giây</a:t>
             </a:r>
           </a:p>
           <a:p>
@@ -6981,7 +7925,49 @@
                 </a:solidFill>
                 <a:latin typeface="Calibri"/>
               </a:rPr>
-              <a:t>Lỗi 3: (4/3; −1/3) nằm trên d₁ (bỏ bờ)</a:t>
+              <a:t>Truyền hình 400 nghìn/giây, tối đa 360 giây</a:t>
+            </a:r>
+          </a:p>
+          <a:p>
+            <a:pPr algn="l" marL="365760" indent="-365760">
+              <a:spcAft>
+                <a:spcPts val="1000"/>
+              </a:spcAft>
+              <a:buClr>
+                <a:srgbClr val="1E40AF"/>
+              </a:buClr>
+              <a:buFont typeface="Arial"/>
+              <a:buChar char="•"/>
+            </a:pPr>
+            <a:r>
+              <a:rPr sz="2400">
+                <a:solidFill>
+                  <a:srgbClr val="1E293B"/>
+                </a:solidFill>
+                <a:latin typeface="Calibri"/>
+              </a:rPr>
+              <a:t>Truyền hình hiệu quả gấp 8 lần</a:t>
+            </a:r>
+          </a:p>
+          <a:p>
+            <a:pPr algn="l" marL="365760" indent="-365760">
+              <a:spcAft>
+                <a:spcPts val="1000"/>
+              </a:spcAft>
+              <a:buClr>
+                <a:srgbClr val="1E40AF"/>
+              </a:buClr>
+              <a:buFont typeface="Arial"/>
+              <a:buChar char="•"/>
+            </a:pPr>
+            <a:r>
+              <a:rPr sz="2400">
+                <a:solidFill>
+                  <a:srgbClr val="1E293B"/>
+                </a:solidFill>
+                <a:latin typeface="Calibri"/>
+              </a:rPr>
+              <a:t>Phân bổ thế nào hiệu quả nhất?</a:t>
             </a:r>
           </a:p>
         </p:txBody>
@@ -6994,21 +7980,17 @@
         </p:nvSpPr>
         <p:spPr>
           <a:xfrm>
-            <a:off x="731520" y="3346703"/>
-            <a:ext cx="8686800" cy="685800"/>
+            <a:off x="10701223" y="457200"/>
+            <a:ext cx="941832" cy="457200"/>
           </a:xfrm>
           <a:prstGeom prst="roundRect">
-            <a:avLst>
-              <a:gd name="adj" fmla="val 8000"/>
-            </a:avLst>
+            <a:avLst/>
           </a:prstGeom>
           <a:solidFill>
-            <a:srgbClr val="FEF2F2"/>
+            <a:srgbClr val="1E40AF"/>
           </a:solidFill>
-          <a:ln w="19050">
-            <a:solidFill>
-              <a:srgbClr val="991B1B"/>
-            </a:solidFill>
+          <a:ln>
+            <a:noFill/>
           </a:ln>
           <a:effectLst/>
         </p:spPr>
@@ -7027,48 +8009,18 @@
           </a:fontRef>
         </p:style>
         <p:txBody>
-          <a:bodyPr rtlCol="0" anchor="ctr"/>
+          <a:bodyPr rtlCol="0" anchor="ctr" tIns="0" bIns="0"/>
           <a:lstStyle/>
           <a:p>
             <a:pPr algn="ctr"/>
-          </a:p>
-        </p:txBody>
-      </p:sp>
-      <p:sp>
-        <p:nvSpPr>
-          <p:cNvPr id="8" name="TextBox 7"/>
-          <p:cNvSpPr txBox="1"/>
-          <p:nvPr/>
-        </p:nvSpPr>
-        <p:spPr>
-          <a:xfrm>
-            <a:off x="914400" y="3346703"/>
-            <a:ext cx="8321040" cy="685800"/>
-          </a:xfrm>
-          <a:prstGeom prst="rect">
-            <a:avLst/>
-          </a:prstGeom>
-          <a:noFill/>
-        </p:spPr>
-        <p:txBody>
-          <a:bodyPr wrap="square" anchor="ctr">
-            <a:spAutoFit/>
-          </a:bodyPr>
-          <a:lstStyle/>
-          <a:p>
-            <a:pPr algn="l">
-              <a:spcAft>
-                <a:spcPts val="400"/>
-              </a:spcAft>
-            </a:pPr>
-            <a:r>
-              <a:rPr sz="2400" b="1">
-                <a:solidFill>
-                  <a:srgbClr val="991B1B"/>
-                </a:solidFill>
-                <a:latin typeface="Calibri"/>
-              </a:rPr>
-              <a:t>(4/3; −1/3) không thuộc miền nghiệm</a:t>
+            <a:r>
+              <a:rPr sz="1400" b="1">
+                <a:solidFill>
+                  <a:srgbClr val="FFFFFF"/>
+                </a:solidFill>
+                <a:latin typeface="Arial"/>
+              </a:rPr>
+              <a:t>ĐỀ BÀI</a:t>
             </a:r>
           </a:p>
         </p:txBody>
@@ -7484,7 +8436,7 @@
         <p:spPr>
           <a:xfrm>
             <a:off x="731520" y="274320"/>
-            <a:ext cx="10972800" cy="868680"/>
+            <a:ext cx="9610344" cy="868680"/>
           </a:xfrm>
           <a:prstGeom prst="rect">
             <a:avLst/>
@@ -7504,7 +8456,7 @@
                 </a:solidFill>
                 <a:latin typeface="Arial"/>
               </a:rPr>
-              <a:t>BÀI 2.16 – LỜI GIẢI</a:t>
+              <a:t>BÀI 2.16 – QUẢNG CÁO HIỆU QUẢ NHẤT</a:t>
             </a:r>
           </a:p>
         </p:txBody>
@@ -8018,6 +8970,59 @@
           </p:sp>
         </mc:Fallback>
       </mc:AlternateContent>
+      <p:sp>
+        <p:nvSpPr>
+          <p:cNvPr id="11" name="Rounded Rectangle 10"/>
+          <p:cNvSpPr/>
+          <p:nvPr/>
+        </p:nvSpPr>
+        <p:spPr>
+          <a:xfrm>
+            <a:off x="10463479" y="457200"/>
+            <a:ext cx="1179576" cy="457200"/>
+          </a:xfrm>
+          <a:prstGeom prst="roundRect">
+            <a:avLst/>
+          </a:prstGeom>
+          <a:solidFill>
+            <a:srgbClr val="166534"/>
+          </a:solidFill>
+          <a:ln>
+            <a:noFill/>
+          </a:ln>
+          <a:effectLst/>
+        </p:spPr>
+        <p:style>
+          <a:lnRef idx="1">
+            <a:schemeClr val="accent1"/>
+          </a:lnRef>
+          <a:fillRef idx="3">
+            <a:schemeClr val="accent1"/>
+          </a:fillRef>
+          <a:effectRef idx="2">
+            <a:schemeClr val="accent1"/>
+          </a:effectRef>
+          <a:fontRef idx="minor">
+            <a:schemeClr val="lt1"/>
+          </a:fontRef>
+        </p:style>
+        <p:txBody>
+          <a:bodyPr rtlCol="0" anchor="ctr" tIns="0" bIns="0"/>
+          <a:lstStyle/>
+          <a:p>
+            <a:pPr algn="ctr"/>
+            <a:r>
+              <a:rPr sz="1400" b="1">
+                <a:solidFill>
+                  <a:srgbClr val="FFFFFF"/>
+                </a:solidFill>
+                <a:latin typeface="Arial"/>
+              </a:rPr>
+              <a:t>LỜI GIẢI</a:t>
+            </a:r>
+          </a:p>
+        </p:txBody>
+      </p:sp>
     </p:spTree>
   </p:cSld>
   <p:clrMapOvr>
@@ -8097,7 +9102,7 @@
         <p:spPr>
           <a:xfrm>
             <a:off x="731520" y="274320"/>
-            <a:ext cx="10972800" cy="868680"/>
+            <a:ext cx="9848088" cy="868680"/>
           </a:xfrm>
           <a:prstGeom prst="rect">
             <a:avLst/>
@@ -8117,7 +9122,7 @@
                 </a:solidFill>
                 <a:latin typeface="Arial"/>
               </a:rPr>
-              <a:t>BÀI 2.15 – LỜI GIẢI</a:t>
+              <a:t>TRẠM KIỂM CHỨNG AI</a:t>
             </a:r>
           </a:p>
         </p:txBody>
@@ -8196,7 +9201,109 @@
                 </a:solidFill>
                 <a:latin typeface="Calibri"/>
               </a:rPr>
-              <a:t>Toán 10 · Bài tập cuối chương II          18</a:t>
+              <a:t>Toán 10 · Bài tập cuối chương II          21</a:t>
+            </a:r>
+          </a:p>
+        </p:txBody>
+      </p:sp>
+      <p:sp>
+        <p:nvSpPr>
+          <p:cNvPr id="6" name="TextBox 5"/>
+          <p:cNvSpPr txBox="1"/>
+          <p:nvPr/>
+        </p:nvSpPr>
+        <p:spPr>
+          <a:xfrm>
+            <a:off x="731520" y="1508760"/>
+            <a:ext cx="10789920" cy="2267712"/>
+          </a:xfrm>
+          <a:prstGeom prst="rect">
+            <a:avLst/>
+          </a:prstGeom>
+          <a:noFill/>
+        </p:spPr>
+        <p:txBody>
+          <a:bodyPr wrap="square" anchor="t">
+            <a:spAutoFit/>
+          </a:bodyPr>
+          <a:lstStyle/>
+          <a:p>
+            <a:pPr algn="l" marL="365760" indent="-365760">
+              <a:spcAft>
+                <a:spcPts val="1000"/>
+              </a:spcAft>
+              <a:buClr>
+                <a:srgbClr val="1E40AF"/>
+              </a:buClr>
+              <a:buFont typeface="Arial"/>
+              <a:buChar char="•"/>
+            </a:pPr>
+            <a:r>
+              <a:rPr sz="2400">
+                <a:solidFill>
+                  <a:srgbClr val="1E293B"/>
+                </a:solidFill>
+                <a:latin typeface="Calibri"/>
+              </a:rPr>
+              <a:t>AI trả lời Bài 2.13: vẽ d₁, d₂ nét đứt</a:t>
+            </a:r>
+          </a:p>
+          <a:p>
+            <a:pPr algn="l" marL="365760" indent="-365760">
+              <a:spcAft>
+                <a:spcPts val="1000"/>
+              </a:spcAft>
+              <a:buClr>
+                <a:srgbClr val="1E40AF"/>
+              </a:buClr>
+              <a:buFont typeface="Arial"/>
+              <a:buChar char="•"/>
+            </a:pPr>
+            <a:r>
+              <a:rPr sz="2400">
+                <a:solidFill>
+                  <a:srgbClr val="1E293B"/>
+                </a:solidFill>
+                <a:latin typeface="Calibri"/>
+              </a:rPr>
+              <a:t>0 ≥ 3 sai, nhưng vẫn giữ phía chứa O</a:t>
+            </a:r>
+          </a:p>
+          <a:p>
+            <a:pPr algn="l" marL="365760" indent="-365760">
+              <a:spcAft>
+                <a:spcPts val="1000"/>
+              </a:spcAft>
+              <a:buClr>
+                <a:srgbClr val="1E40AF"/>
+              </a:buClr>
+              <a:buFont typeface="Arial"/>
+              <a:buChar char="•"/>
+            </a:pPr>
+            <a:r>
+              <a:rPr sz="2400">
+                <a:solidFill>
+                  <a:srgbClr val="1E293B"/>
+                </a:solidFill>
+                <a:latin typeface="Calibri"/>
+              </a:rPr>
+              <a:t>Điểm (4/3; −1/3) thuộc miền nghiệm</a:t>
+            </a:r>
+          </a:p>
+          <a:p>
+            <a:pPr algn="l">
+              <a:spcAft>
+                <a:spcPts val="1000"/>
+              </a:spcAft>
+            </a:pPr>
+            <a:r>
+              <a:rPr sz="2400" b="1">
+                <a:solidFill>
+                  <a:srgbClr val="1E40AF"/>
+                </a:solidFill>
+                <a:latin typeface="Calibri"/>
+              </a:rPr>
+              <a:t>Gợi mở: Tìm bước sai, giải thích, sửa lại</a:t>
             </a:r>
           </a:p>
         </p:txBody>
@@ -8209,21 +9316,17 @@
         </p:nvSpPr>
         <p:spPr>
           <a:xfrm>
-            <a:off x="731520" y="4526280"/>
-            <a:ext cx="6217920" cy="1645920"/>
+            <a:off x="10701223" y="457200"/>
+            <a:ext cx="941832" cy="457200"/>
           </a:xfrm>
           <a:prstGeom prst="roundRect">
-            <a:avLst>
-              <a:gd name="adj" fmla="val 8000"/>
-            </a:avLst>
+            <a:avLst/>
           </a:prstGeom>
           <a:solidFill>
-            <a:srgbClr val="FEF2F2"/>
+            <a:srgbClr val="1E40AF"/>
           </a:solidFill>
-          <a:ln w="19050">
-            <a:solidFill>
-              <a:srgbClr val="991B1B"/>
-            </a:solidFill>
+          <a:ln>
+            <a:noFill/>
           </a:ln>
           <a:effectLst/>
         </p:spPr>
@@ -8242,395 +9345,22 @@
           </a:fontRef>
         </p:style>
         <p:txBody>
-          <a:bodyPr rtlCol="0" anchor="ctr"/>
+          <a:bodyPr rtlCol="0" anchor="ctr" tIns="0" bIns="0"/>
           <a:lstStyle/>
           <a:p>
             <a:pPr algn="ctr"/>
-          </a:p>
-        </p:txBody>
-      </p:sp>
-      <p:sp>
-        <p:nvSpPr>
-          <p:cNvPr id="8" name="TextBox 7"/>
-          <p:cNvSpPr txBox="1"/>
-          <p:nvPr/>
-        </p:nvSpPr>
-        <p:spPr>
-          <a:xfrm>
-            <a:off x="914400" y="4617720"/>
-            <a:ext cx="5852160" cy="1463040"/>
-          </a:xfrm>
-          <a:prstGeom prst="rect">
-            <a:avLst/>
-          </a:prstGeom>
-          <a:noFill/>
-        </p:spPr>
-        <p:txBody>
-          <a:bodyPr wrap="square" anchor="ctr">
-            <a:spAutoFit/>
-          </a:bodyPr>
-          <a:lstStyle/>
-          <a:p>
-            <a:pPr algn="l">
-              <a:spcAft>
-                <a:spcPts val="1000"/>
-              </a:spcAft>
-            </a:pPr>
-            <a:r>
-              <a:rPr sz="2400" b="1">
-                <a:solidFill>
-                  <a:srgbClr val="991B1B"/>
-                </a:solidFill>
-                <a:latin typeface="Calibri"/>
-              </a:rPr>
-              <a:t>Đầu tư 750 – 250 – 200 (triệu)</a:t>
-            </a:r>
-          </a:p>
-          <a:p>
-            <a:pPr algn="l">
-              <a:spcAft>
-                <a:spcPts val="1000"/>
-              </a:spcAft>
-            </a:pPr>
-            <a:r>
-              <a:rPr sz="2400" b="1">
-                <a:solidFill>
-                  <a:srgbClr val="991B1B"/>
-                </a:solidFill>
-                <a:latin typeface="Calibri"/>
-              </a:rPr>
-              <a:t>Lợi nhuận lớn nhất: 96,5 triệu</a:t>
-            </a:r>
-          </a:p>
-        </p:txBody>
-      </p:sp>
-      <p:pic>
-        <p:nvPicPr>
-          <p:cNvPr id="9" name="Picture 8" descr="fig_2_15.png"/>
-          <p:cNvPicPr>
-            <a:picLocks noChangeAspect="1"/>
-          </p:cNvPicPr>
-          <p:nvPr/>
-        </p:nvPicPr>
-        <p:blipFill>
-          <a:blip r:embed="rId2"/>
-          <a:stretch>
-            <a:fillRect/>
-          </a:stretch>
-        </p:blipFill>
-        <p:spPr>
-          <a:xfrm>
-            <a:off x="7223760" y="1463040"/>
-            <a:ext cx="4572000" cy="3693149"/>
-          </a:xfrm>
-          <a:prstGeom prst="rect">
-            <a:avLst/>
-          </a:prstGeom>
-        </p:spPr>
-      </p:pic>
-      <mc:AlternateContent xmlns:mc="http://schemas.openxmlformats.org/markup-compatibility/2006">
-        <mc:Choice xmlns:a14="http://schemas.microsoft.com/office/drawing/2010/main" Requires="a14">
-          <p:sp>
-            <p:nvSpPr>
-              <p:cNvPr id="10" name="TextBox 9"/>
-              <p:cNvSpPr txBox="1"/>
-              <p:nvPr/>
-            </p:nvSpPr>
-            <p:spPr>
-              <a:xfrm>
-                <a:off x="731520" y="1463040"/>
-                <a:ext cx="6400800" cy="2880360"/>
-              </a:xfrm>
-              <a:prstGeom prst="rect">
-                <a:avLst/>
-              </a:prstGeom>
-              <a:noFill/>
-            </p:spPr>
-            <p:txBody>
-              <a:bodyPr wrap="square">
-                <a:spAutoFit/>
-              </a:bodyPr>
-              <a:lstStyle/>
-              <a:p>
-                <a:pPr marL="365760" indent="-365760">
-                  <a:spcAft>
-                    <a:spcPts val="800"/>
-                  </a:spcAft>
-                  <a:buClr>
-                    <a:srgbClr val="1E40AF"/>
-                  </a:buClr>
-                  <a:buFont typeface="Arial"/>
-                  <a:buChar char="•"/>
-                </a:pPr>
-                <a:r>
-                  <a:rPr sz="2200" b="0">
-                    <a:solidFill>
-                      <a:srgbClr val="1E293B"/>
-                    </a:solidFill>
-                    <a:latin typeface="Calibri"/>
-                  </a:rPr>
-                  <a:t>x: chính phủ, y: ngân hàng (triệu đồng)</a:t>
-                </a:r>
-              </a:p>
-              <a:p>
-                <a:pPr marL="365760" indent="-365760">
-                  <a:spcAft>
-                    <a:spcPts val="800"/>
-                  </a:spcAft>
-                  <a:buClr>
-                    <a:srgbClr val="1E40AF"/>
-                  </a:buClr>
-                  <a:buFont typeface="Arial"/>
-                  <a:buChar char="•"/>
-                </a:pPr>
-                <a:r>
-                  <a:rPr sz="2200" b="0">
-                    <a:solidFill>
-                      <a:srgbClr val="1E293B"/>
-                    </a:solidFill>
-                    <a:latin typeface="Calibri"/>
-                  </a:rPr>
-                  <a:t>Doanh nghiệp: 1200 − x − y (triệu đồng)</a:t>
-                </a:r>
-              </a:p>
-              <a:p>
-                <a:pPr marL="365760" indent="-365760">
-                  <a:spcAft>
-                    <a:spcPts val="200"/>
-                  </a:spcAft>
-                  <a:buClr>
-                    <a:srgbClr val="1E40AF"/>
-                  </a:buClr>
-                  <a:buFont typeface="Arial"/>
-                  <a:buChar char="•"/>
-                </a:pPr>
-                <a:r>
-                  <a:rPr sz="2200" b="0">
-                    <a:solidFill>
-                      <a:srgbClr val="1E293B"/>
-                    </a:solidFill>
-                    <a:latin typeface="Calibri"/>
-                  </a:rPr>
-                  <a:t>Ta có hệ bất phương trình:</a:t>
-                </a:r>
-              </a:p>
-              <a:p xmlns:m="http://schemas.openxmlformats.org/officeDocument/2006/math">
-                <a:pPr marL="457200" indent="0">
-                  <a:spcBef>
-                    <a:spcPts val="200"/>
-                  </a:spcBef>
-                  <a:spcAft>
-                    <a:spcPts val="800"/>
-                  </a:spcAft>
-                  <a:buNone/>
-                </a:pPr>
-                <a14:m>
-                  <m:oMathPara>
-                    <m:oMathParaPr>
-                      <m:jc m:val="left"/>
-                    </m:oMathParaPr>
-                    <m:oMath>
-                      <m:d>
-                        <m:dPr>
-                          <m:begChr m:val="{"/>
-                          <m:endChr m:val=""/>
-                        </m:dPr>
-                        <m:e>
-                          <m:eqArr>
-                            <m:e>
-                              <m:r>
-                                <a:rPr lang="vi-VN" sz="2400" b="0">
-                                  <a:solidFill>
-                                    <a:srgbClr val="1E293B"/>
-                                  </a:solidFill>
-                                  <a:latin typeface="Cambria Math" panose="02040503050406030204" pitchFamily="18" charset="0"/>
-                                  <a:cs typeface="Cambria Math"/>
-                                </a:rPr>
-                                <m:t>&amp;x≥3y</m:t>
-                              </m:r>
-                            </m:e>
-                            <m:e>
-                              <m:r>
-                                <a:rPr lang="vi-VN" sz="2400" b="0">
-                                  <a:solidFill>
-                                    <a:srgbClr val="1E293B"/>
-                                  </a:solidFill>
-                                  <a:latin typeface="Cambria Math" panose="02040503050406030204" pitchFamily="18" charset="0"/>
-                                  <a:cs typeface="Cambria Math"/>
-                                </a:rPr>
-                                <m:t>&amp;1000≤x+y≤1200</m:t>
-                              </m:r>
-                            </m:e>
-                            <m:e>
-                              <m:r>
-                                <a:rPr lang="vi-VN" sz="2400" b="0">
-                                  <a:solidFill>
-                                    <a:srgbClr val="1E293B"/>
-                                  </a:solidFill>
-                                  <a:latin typeface="Cambria Math" panose="02040503050406030204" pitchFamily="18" charset="0"/>
-                                  <a:cs typeface="Cambria Math"/>
-                                </a:rPr>
-                                <m:t>&amp;y≥0</m:t>
-                              </m:r>
-                            </m:e>
-                          </m:eqArr>
-                        </m:e>
-                      </m:d>
-                    </m:oMath>
-                  </m:oMathPara>
-                </a14:m>
-                <a:endParaRPr lang="vi-VN" sz="2400"/>
-              </a:p>
-              <a:p>
-                <a:pPr marL="365760" indent="-365760">
-                  <a:spcAft>
-                    <a:spcPts val="800"/>
-                  </a:spcAft>
-                  <a:buClr>
-                    <a:srgbClr val="1E40AF"/>
-                  </a:buClr>
-                  <a:buFont typeface="Arial"/>
-                  <a:buChar char="•"/>
-                </a:pPr>
-                <a:r>
-                  <a:rPr sz="2200" b="0">
-                    <a:solidFill>
-                      <a:srgbClr val="1E293B"/>
-                    </a:solidFill>
-                    <a:latin typeface="Calibri"/>
-                  </a:rPr>
-                  <a:t>Lợi nhuận: L = 144 − 0,05x − 0,04y</a:t>
-                </a:r>
-              </a:p>
-            </p:txBody>
-          </p:sp>
-        </mc:Choice>
-        <mc:Fallback>
-          <p:sp>
-            <p:nvSpPr>
-              <p:cNvPr id="10" name="TextBox 9"/>
-              <p:cNvSpPr txBox="1"/>
-              <p:nvPr/>
-            </p:nvSpPr>
-            <p:spPr>
-              <a:xfrm>
-                <a:off x="731520" y="1463040"/>
-                <a:ext cx="6400800" cy="2880360"/>
-              </a:xfrm>
-              <a:prstGeom prst="rect">
-                <a:avLst/>
-              </a:prstGeom>
-              <a:noFill/>
-            </p:spPr>
-            <p:txBody>
-              <a:bodyPr wrap="square">
-                <a:spAutoFit/>
-              </a:bodyPr>
-              <a:lstStyle/>
-              <a:p>
-                <a:pPr marL="365760" indent="-365760">
-                  <a:spcAft>
-                    <a:spcPts val="800"/>
-                  </a:spcAft>
-                  <a:buClr>
-                    <a:srgbClr val="1E40AF"/>
-                  </a:buClr>
-                  <a:buFont typeface="Arial"/>
-                  <a:buChar char="•"/>
-                </a:pPr>
-                <a:r>
-                  <a:rPr sz="2200" b="0">
-                    <a:solidFill>
-                      <a:srgbClr val="1E293B"/>
-                    </a:solidFill>
-                    <a:latin typeface="Calibri"/>
-                  </a:rPr>
-                  <a:t>x: chính phủ, y: ngân hàng (triệu đồng)</a:t>
-                </a:r>
-              </a:p>
-              <a:p>
-                <a:pPr marL="365760" indent="-365760">
-                  <a:spcAft>
-                    <a:spcPts val="800"/>
-                  </a:spcAft>
-                  <a:buClr>
-                    <a:srgbClr val="1E40AF"/>
-                  </a:buClr>
-                  <a:buFont typeface="Arial"/>
-                  <a:buChar char="•"/>
-                </a:pPr>
-                <a:r>
-                  <a:rPr sz="2200" b="0">
-                    <a:solidFill>
-                      <a:srgbClr val="1E293B"/>
-                    </a:solidFill>
-                    <a:latin typeface="Calibri"/>
-                  </a:rPr>
-                  <a:t>Doanh nghiệp: 1200 − x − y (triệu đồng)</a:t>
-                </a:r>
-              </a:p>
-              <a:p>
-                <a:pPr marL="365760" indent="-365760">
-                  <a:spcAft>
-                    <a:spcPts val="200"/>
-                  </a:spcAft>
-                  <a:buClr>
-                    <a:srgbClr val="1E40AF"/>
-                  </a:buClr>
-                  <a:buFont typeface="Arial"/>
-                  <a:buChar char="•"/>
-                </a:pPr>
-                <a:r>
-                  <a:rPr sz="2200" b="0">
-                    <a:solidFill>
-                      <a:srgbClr val="1E293B"/>
-                    </a:solidFill>
-                    <a:latin typeface="Calibri"/>
-                  </a:rPr>
-                  <a:t>Ta có hệ bất phương trình:</a:t>
-                </a:r>
-              </a:p>
-              <a:p xmlns:a14="http://schemas.microsoft.com/office/drawing/2010/main" xmlns:m="http://schemas.openxmlformats.org/officeDocument/2006/math">
-                <a:pPr marL="457200" indent="0">
-                  <a:spcBef>
-                    <a:spcPts val="200"/>
-                  </a:spcBef>
-                  <a:spcAft>
-                    <a:spcPts val="800"/>
-                  </a:spcAft>
-                  <a:buNone/>
-                </a:pPr>
-                <a:r>
-                  <a:rPr lang="vi-VN"/>
-                  <a:t>{ x≥3y ; 1000≤x+y≤1200 ; y≥0</a:t>
-                </a:r>
-                <a:endParaRPr lang="vi-VN" sz="2400"/>
-              </a:p>
-              <a:p>
-                <a:pPr marL="365760" indent="-365760">
-                  <a:spcAft>
-                    <a:spcPts val="800"/>
-                  </a:spcAft>
-                  <a:buClr>
-                    <a:srgbClr val="1E40AF"/>
-                  </a:buClr>
-                  <a:buFont typeface="Arial"/>
-                  <a:buChar char="•"/>
-                </a:pPr>
-                <a:r>
-                  <a:rPr sz="2200" b="0">
-                    <a:solidFill>
-                      <a:srgbClr val="1E293B"/>
-                    </a:solidFill>
-                    <a:latin typeface="Calibri"/>
-                  </a:rPr>
-                  <a:t>Lợi nhuận: L = 144 − 0,05x − 0,04y</a:t>
-                </a:r>
-              </a:p>
-            </p:txBody>
-          </p:sp>
-        </mc:Fallback>
-      </mc:AlternateContent>
+            <a:r>
+              <a:rPr sz="1400" b="1">
+                <a:solidFill>
+                  <a:srgbClr val="FFFFFF"/>
+                </a:solidFill>
+                <a:latin typeface="Arial"/>
+              </a:rPr>
+              <a:t>ĐỀ BÀI</a:t>
+            </a:r>
+          </a:p>
+        </p:txBody>
+      </p:sp>
     </p:spTree>
   </p:cSld>
   <p:clrMapOvr>
@@ -8710,7 +9440,7 @@
         <p:spPr>
           <a:xfrm>
             <a:off x="731520" y="274320"/>
-            <a:ext cx="10972800" cy="868680"/>
+            <a:ext cx="9610344" cy="868680"/>
           </a:xfrm>
           <a:prstGeom prst="rect">
             <a:avLst/>
@@ -8730,7 +9460,7 @@
                 </a:solidFill>
                 <a:latin typeface="Arial"/>
               </a:rPr>
-              <a:t>BÀI 2.14 – LỜI GIẢI</a:t>
+              <a:t>TRẠM KIỂM CHỨNG AI</a:t>
             </a:r>
           </a:p>
         </p:txBody>
@@ -8809,7 +9539,7 @@
                 </a:solidFill>
                 <a:latin typeface="Calibri"/>
               </a:rPr>
-              <a:t>Toán 10 · Bài tập cuối chương II          16</a:t>
+              <a:t>Toán 10 · Bài tập cuối chương II          22</a:t>
             </a:r>
           </a:p>
         </p:txBody>
@@ -8822,8 +9552,8 @@
         </p:nvSpPr>
         <p:spPr>
           <a:xfrm>
-            <a:off x="731520" y="1463040"/>
-            <a:ext cx="6400800" cy="3017520"/>
+            <a:off x="731520" y="1508760"/>
+            <a:ext cx="10789920" cy="1700784"/>
           </a:xfrm>
           <a:prstGeom prst="rect">
             <a:avLst/>
@@ -8853,7 +9583,7 @@
                 </a:solidFill>
                 <a:latin typeface="Calibri"/>
               </a:rPr>
-              <a:t>Đỉnh: A(−1; 0), B(1; 4), C(5; 4), D(5; −6)</a:t>
+              <a:t>Lỗi 1: d₂ (2x − y ≥ 3) phải nét liền</a:t>
             </a:r>
           </a:p>
           <a:p>
@@ -8874,7 +9604,7 @@
                 </a:solidFill>
                 <a:latin typeface="Calibri"/>
               </a:rPr>
-              <a:t>F = −x − y</a:t>
+              <a:t>Lỗi 2: O không thỏa mãn ⇒ bỏ phía chứa O</a:t>
             </a:r>
           </a:p>
           <a:p>
@@ -8895,28 +9625,7 @@
                 </a:solidFill>
                 <a:latin typeface="Calibri"/>
               </a:rPr>
-              <a:t>F(A) = 1; F(B) = −5</a:t>
-            </a:r>
-          </a:p>
-          <a:p>
-            <a:pPr algn="l" marL="365760" indent="-365760">
-              <a:spcAft>
-                <a:spcPts val="1000"/>
-              </a:spcAft>
-              <a:buClr>
-                <a:srgbClr val="1E40AF"/>
-              </a:buClr>
-              <a:buFont typeface="Arial"/>
-              <a:buChar char="•"/>
-            </a:pPr>
-            <a:r>
-              <a:rPr sz="2400">
-                <a:solidFill>
-                  <a:srgbClr val="1E293B"/>
-                </a:solidFill>
-                <a:latin typeface="Calibri"/>
-              </a:rPr>
-              <a:t>F(C) = −9; F(D) = 1</a:t>
+              <a:t>Lỗi 3: (4/3; −1/3) nằm trên d₁ (bỏ bờ)</a:t>
             </a:r>
           </a:p>
         </p:txBody>
@@ -8929,8 +9638,8 @@
         </p:nvSpPr>
         <p:spPr>
           <a:xfrm>
-            <a:off x="731520" y="4389120"/>
-            <a:ext cx="6035040" cy="1554480"/>
+            <a:off x="731520" y="3346703"/>
+            <a:ext cx="8686800" cy="685800"/>
           </a:xfrm>
           <a:prstGeom prst="roundRect">
             <a:avLst>
@@ -8977,8 +9686,8 @@
         </p:nvSpPr>
         <p:spPr>
           <a:xfrm>
-            <a:off x="914400" y="4480560"/>
-            <a:ext cx="5669280" cy="1371600"/>
+            <a:off x="914400" y="3346703"/>
+            <a:ext cx="8321040" cy="685800"/>
           </a:xfrm>
           <a:prstGeom prst="rect">
             <a:avLst/>
@@ -8993,7 +9702,7 @@
           <a:p>
             <a:pPr algn="l">
               <a:spcAft>
-                <a:spcPts val="1000"/>
+                <a:spcPts val="400"/>
               </a:spcAft>
             </a:pPr>
             <a:r>
@@ -9003,51 +9712,64 @@
                 </a:solidFill>
                 <a:latin typeface="Calibri"/>
               </a:rPr>
-              <a:t>max F = 1 (trên cạnh AD)</a:t>
-            </a:r>
-          </a:p>
-          <a:p>
-            <a:pPr algn="l">
-              <a:spcAft>
-                <a:spcPts val="1000"/>
-              </a:spcAft>
-            </a:pPr>
-            <a:r>
-              <a:rPr sz="2400" b="1">
-                <a:solidFill>
-                  <a:srgbClr val="991B1B"/>
-                </a:solidFill>
-                <a:latin typeface="Calibri"/>
-              </a:rPr>
-              <a:t>min F = −9 tại C(5; 4)</a:t>
-            </a:r>
-          </a:p>
-        </p:txBody>
-      </p:sp>
-      <p:pic>
-        <p:nvPicPr>
-          <p:cNvPr id="9" name="Picture 8" descr="fig_2_14.png"/>
-          <p:cNvPicPr>
-            <a:picLocks noChangeAspect="1"/>
-          </p:cNvPicPr>
-          <p:nvPr/>
-        </p:nvPicPr>
-        <p:blipFill>
-          <a:blip r:embed="rId2"/>
-          <a:stretch>
-            <a:fillRect/>
-          </a:stretch>
-        </p:blipFill>
-        <p:spPr>
-          <a:xfrm>
-            <a:off x="7406640" y="1371600"/>
-            <a:ext cx="4677063" cy="4892040"/>
-          </a:xfrm>
-          <a:prstGeom prst="rect">
-            <a:avLst/>
-          </a:prstGeom>
-        </p:spPr>
-      </p:pic>
+              <a:t>(4/3; −1/3) không thuộc miền nghiệm</a:t>
+            </a:r>
+          </a:p>
+        </p:txBody>
+      </p:sp>
+      <p:sp>
+        <p:nvSpPr>
+          <p:cNvPr id="9" name="Rounded Rectangle 8"/>
+          <p:cNvSpPr/>
+          <p:nvPr/>
+        </p:nvSpPr>
+        <p:spPr>
+          <a:xfrm>
+            <a:off x="10463479" y="457200"/>
+            <a:ext cx="1179576" cy="457200"/>
+          </a:xfrm>
+          <a:prstGeom prst="roundRect">
+            <a:avLst/>
+          </a:prstGeom>
+          <a:solidFill>
+            <a:srgbClr val="166534"/>
+          </a:solidFill>
+          <a:ln>
+            <a:noFill/>
+          </a:ln>
+          <a:effectLst/>
+        </p:spPr>
+        <p:style>
+          <a:lnRef idx="1">
+            <a:schemeClr val="accent1"/>
+          </a:lnRef>
+          <a:fillRef idx="3">
+            <a:schemeClr val="accent1"/>
+          </a:fillRef>
+          <a:effectRef idx="2">
+            <a:schemeClr val="accent1"/>
+          </a:effectRef>
+          <a:fontRef idx="minor">
+            <a:schemeClr val="lt1"/>
+          </a:fontRef>
+        </p:style>
+        <p:txBody>
+          <a:bodyPr rtlCol="0" anchor="ctr" tIns="0" bIns="0"/>
+          <a:lstStyle/>
+          <a:p>
+            <a:pPr algn="ctr"/>
+            <a:r>
+              <a:rPr sz="1400" b="1">
+                <a:solidFill>
+                  <a:srgbClr val="FFFFFF"/>
+                </a:solidFill>
+                <a:latin typeface="Arial"/>
+              </a:rPr>
+              <a:t>LỜI GIẢI</a:t>
+            </a:r>
+          </a:p>
+        </p:txBody>
+      </p:sp>
     </p:spTree>
   </p:cSld>
   <p:clrMapOvr>
@@ -9147,7 +9869,7 @@
                 </a:solidFill>
                 <a:latin typeface="Arial"/>
               </a:rPr>
-              <a:t>BÀI 2.13 – LỜI GIẢI</a:t>
+              <a:t>NHIỆM VỤ VỀ NHÀ</a:t>
             </a:r>
           </a:p>
         </p:txBody>
@@ -9226,7 +9948,7 @@
                 </a:solidFill>
                 <a:latin typeface="Calibri"/>
               </a:rPr>
-              <a:t>Toán 10 · Bài tập cuối chương II          14</a:t>
+              <a:t>Toán 10 · Bài tập cuối chương II          23</a:t>
             </a:r>
           </a:p>
         </p:txBody>
@@ -9239,8 +9961,8 @@
         </p:nvSpPr>
         <p:spPr>
           <a:xfrm>
-            <a:off x="731520" y="1463040"/>
-            <a:ext cx="6400800" cy="3840480"/>
+            <a:off x="731520" y="1554480"/>
+            <a:ext cx="10515600" cy="4572000"/>
           </a:xfrm>
           <a:prstGeom prst="rect">
             <a:avLst/>
@@ -9264,13 +9986,13 @@
               <a:buChar char="•"/>
             </a:pPr>
             <a:r>
-              <a:rPr sz="2400">
+              <a:rPr sz="2600">
                 <a:solidFill>
                   <a:srgbClr val="1E293B"/>
                 </a:solidFill>
                 <a:latin typeface="Calibri"/>
               </a:rPr>
-              <a:t>d₁: x + y = 1, nét đứt</a:t>
+              <a:t>Hoàn thiện Bài 2.15 (nếu chưa xong)</a:t>
             </a:r>
           </a:p>
           <a:p>
@@ -9285,13 +10007,13 @@
               <a:buChar char="•"/>
             </a:pPr>
             <a:r>
-              <a:rPr sz="2400">
+              <a:rPr sz="2600">
                 <a:solidFill>
                   <a:srgbClr val="1E293B"/>
                 </a:solidFill>
                 <a:latin typeface="Calibri"/>
               </a:rPr>
-              <a:t>O thỏa mãn → giữ phía chứa O</a:t>
+              <a:t>Tìm số liệu thật ở Gia Lai</a:t>
             </a:r>
           </a:p>
           <a:p>
@@ -9306,13 +10028,13 @@
               <a:buChar char="•"/>
             </a:pPr>
             <a:r>
-              <a:rPr sz="2400">
+              <a:rPr sz="2600">
                 <a:solidFill>
                   <a:srgbClr val="1E293B"/>
                 </a:solidFill>
                 <a:latin typeface="Calibri"/>
               </a:rPr>
-              <a:t>d₂: 2x − y = 3, nét liền</a:t>
+              <a:t>Tự đặt bài toán tối ưu (≥ 3 BPT)</a:t>
             </a:r>
           </a:p>
           <a:p>
@@ -9327,144 +10049,59 @@
               <a:buChar char="•"/>
             </a:pPr>
             <a:r>
-              <a:rPr sz="2400">
+              <a:rPr sz="2600">
                 <a:solidFill>
                   <a:srgbClr val="1E293B"/>
                 </a:solidFill>
                 <a:latin typeface="Calibri"/>
               </a:rPr>
-              <a:t>O không thỏa mãn → bỏ phía chứa O</a:t>
-            </a:r>
-          </a:p>
-        </p:txBody>
-      </p:sp>
-      <p:sp>
-        <p:nvSpPr>
-          <p:cNvPr id="7" name="Rounded Rectangle 6"/>
-          <p:cNvSpPr/>
-          <p:nvPr/>
-        </p:nvSpPr>
-        <p:spPr>
-          <a:xfrm>
-            <a:off x="731520" y="4572000"/>
-            <a:ext cx="6035040" cy="1371600"/>
-          </a:xfrm>
-          <a:prstGeom prst="roundRect">
-            <a:avLst>
-              <a:gd name="adj" fmla="val 8000"/>
-            </a:avLst>
-          </a:prstGeom>
-          <a:solidFill>
-            <a:srgbClr val="FEF2F2"/>
-          </a:solidFill>
-          <a:ln w="19050">
-            <a:solidFill>
-              <a:srgbClr val="991B1B"/>
-            </a:solidFill>
-          </a:ln>
-          <a:effectLst/>
-        </p:spPr>
-        <p:style>
-          <a:lnRef idx="1">
-            <a:schemeClr val="accent1"/>
-          </a:lnRef>
-          <a:fillRef idx="3">
-            <a:schemeClr val="accent1"/>
-          </a:fillRef>
-          <a:effectRef idx="2">
-            <a:schemeClr val="accent1"/>
-          </a:effectRef>
-          <a:fontRef idx="minor">
-            <a:schemeClr val="lt1"/>
-          </a:fontRef>
-        </p:style>
-        <p:txBody>
-          <a:bodyPr rtlCol="0" anchor="ctr"/>
-          <a:lstStyle/>
-          <a:p>
-            <a:pPr algn="ctr"/>
-          </a:p>
-        </p:txBody>
-      </p:sp>
-      <p:sp>
-        <p:nvSpPr>
-          <p:cNvPr id="8" name="TextBox 7"/>
-          <p:cNvSpPr txBox="1"/>
-          <p:nvPr/>
-        </p:nvSpPr>
-        <p:spPr>
-          <a:xfrm>
-            <a:off x="914400" y="4663440"/>
-            <a:ext cx="5669280" cy="1188720"/>
-          </a:xfrm>
-          <a:prstGeom prst="rect">
-            <a:avLst/>
-          </a:prstGeom>
-          <a:noFill/>
-        </p:spPr>
-        <p:txBody>
-          <a:bodyPr wrap="square" anchor="ctr">
-            <a:spAutoFit/>
-          </a:bodyPr>
-          <a:lstStyle/>
-          <a:p>
-            <a:pPr algn="l">
+              <a:t>Kiểm tra miền nghiệm bằng GeoGebra</a:t>
+            </a:r>
+          </a:p>
+          <a:p>
+            <a:pPr algn="l" marL="365760" indent="-365760">
               <a:spcAft>
                 <a:spcPts val="1000"/>
               </a:spcAft>
+              <a:buClr>
+                <a:srgbClr val="1E40AF"/>
+              </a:buClr>
+              <a:buFont typeface="Arial"/>
+              <a:buChar char="•"/>
             </a:pPr>
             <a:r>
-              <a:rPr sz="2200" b="1">
-                <a:solidFill>
-                  <a:srgbClr val="991B1B"/>
+              <a:rPr sz="2600">
+                <a:solidFill>
+                  <a:srgbClr val="1E293B"/>
                 </a:solidFill>
                 <a:latin typeface="Calibri"/>
               </a:rPr>
-              <a:t>Điểm (4/3; −1/3) nằm trên d₁</a:t>
-            </a:r>
-          </a:p>
-          <a:p>
-            <a:pPr algn="l">
+              <a:t>Ghi Nhật ký AI, nộp sau 1 tuần</a:t>
+            </a:r>
+          </a:p>
+          <a:p>
+            <a:pPr algn="l" marL="365760" indent="-365760">
               <a:spcAft>
                 <a:spcPts val="1000"/>
               </a:spcAft>
+              <a:buClr>
+                <a:srgbClr val="1E40AF"/>
+              </a:buClr>
+              <a:buFont typeface="Arial"/>
+              <a:buChar char="•"/>
             </a:pPr>
             <a:r>
-              <a:rPr sz="2200" b="1">
-                <a:solidFill>
-                  <a:srgbClr val="991B1B"/>
+              <a:rPr sz="2600">
+                <a:solidFill>
+                  <a:srgbClr val="1E293B"/>
                 </a:solidFill>
                 <a:latin typeface="Calibri"/>
               </a:rPr>
-              <a:t>→ không thuộc miền nghiệm</a:t>
-            </a:r>
-          </a:p>
-        </p:txBody>
-      </p:sp>
-      <p:pic>
-        <p:nvPicPr>
-          <p:cNvPr id="9" name="Picture 8" descr="fig_2_13.png"/>
-          <p:cNvPicPr>
-            <a:picLocks noChangeAspect="1"/>
-          </p:cNvPicPr>
-          <p:nvPr/>
-        </p:nvPicPr>
-        <p:blipFill>
-          <a:blip r:embed="rId2"/>
-          <a:stretch>
-            <a:fillRect/>
-          </a:stretch>
-        </p:blipFill>
-        <p:spPr>
-          <a:xfrm>
-            <a:off x="7132320" y="1417320"/>
-            <a:ext cx="5689328" cy="4754880"/>
-          </a:xfrm>
-          <a:prstGeom prst="rect">
-            <a:avLst/>
-          </a:prstGeom>
-        </p:spPr>
-      </p:pic>
+              <a:t>Đọc trước Bài 5 (Chương III)</a:t>
+            </a:r>
+          </a:p>
+        </p:txBody>
+      </p:sp>
     </p:spTree>
   </p:cSld>
   <p:clrMapOvr>
@@ -9564,7 +10201,7 @@
                 </a:solidFill>
                 <a:latin typeface="Arial"/>
               </a:rPr>
-              <a:t>BÀI 2.12 – LỜI GIẢI</a:t>
+              <a:t>BÀI TẬP CỦA BẠN</a:t>
             </a:r>
           </a:p>
         </p:txBody>
@@ -9643,21 +10280,91 @@
                 </a:solidFill>
                 <a:latin typeface="Calibri"/>
               </a:rPr>
-              <a:t>Toán 10 · Bài tập cuối chương II          12</a:t>
-            </a:r>
-          </a:p>
-        </p:txBody>
-      </p:sp>
-      <p:sp>
-        <p:nvSpPr>
-          <p:cNvPr id="6" name="TextBox 5"/>
+              <a:t>Toán 10 · Bài tập cuối chương II          24</a:t>
+            </a:r>
+          </a:p>
+        </p:txBody>
+      </p:sp>
+      <p:sp>
+        <p:nvSpPr>
+          <p:cNvPr id="6" name="Rectangle 5"/>
+          <p:cNvSpPr/>
+          <p:nvPr/>
+        </p:nvSpPr>
+        <p:spPr>
+          <a:xfrm>
+            <a:off x="731520" y="1463040"/>
+            <a:ext cx="4572000" cy="4572000"/>
+          </a:xfrm>
+          <a:prstGeom prst="rect">
+            <a:avLst/>
+          </a:prstGeom>
+          <a:solidFill>
+            <a:srgbClr val="F8FAFC"/>
+          </a:solidFill>
+          <a:ln w="19050">
+            <a:solidFill>
+              <a:srgbClr val="E2E8F0"/>
+            </a:solidFill>
+          </a:ln>
+          <a:effectLst/>
+        </p:spPr>
+        <p:style>
+          <a:lnRef idx="1">
+            <a:schemeClr val="accent1"/>
+          </a:lnRef>
+          <a:fillRef idx="3">
+            <a:schemeClr val="accent1"/>
+          </a:fillRef>
+          <a:effectRef idx="2">
+            <a:schemeClr val="accent1"/>
+          </a:effectRef>
+          <a:fontRef idx="minor">
+            <a:schemeClr val="lt1"/>
+          </a:fontRef>
+        </p:style>
+        <p:txBody>
+          <a:bodyPr rtlCol="0" anchor="ctr"/>
+          <a:lstStyle/>
+          <a:p>
+            <a:pPr algn="ctr"/>
+          </a:p>
+        </p:txBody>
+      </p:sp>
+      <p:pic>
+        <p:nvPicPr>
+          <p:cNvPr id="7" name="Picture 6" descr="QR_CungCo_Chuong2_Toan10.png"/>
+          <p:cNvPicPr>
+            <a:picLocks noChangeAspect="1"/>
+          </p:cNvPicPr>
+          <p:nvPr/>
+        </p:nvPicPr>
+        <p:blipFill>
+          <a:blip r:embed="rId2"/>
+          <a:stretch>
+            <a:fillRect/>
+          </a:stretch>
+        </p:blipFill>
+        <p:spPr>
+          <a:xfrm>
+            <a:off x="960120" y="1691640"/>
+            <a:ext cx="4114800" cy="4114800"/>
+          </a:xfrm>
+          <a:prstGeom prst="rect">
+            <a:avLst/>
+          </a:prstGeom>
+        </p:spPr>
+      </p:pic>
+      <p:sp>
+        <p:nvSpPr>
+          <p:cNvPr id="8" name="TextBox 7"/>
           <p:cNvSpPr txBox="1"/>
           <p:nvPr/>
         </p:nvSpPr>
         <p:spPr>
           <a:xfrm>
-            <a:off x="731520" y="1463040"/>
-            <a:ext cx="6400800" cy="3657600"/>
+            <a:off x="5760720" y="1554480"/>
+            <a:ext cx="6035040" cy="3108960"/>
           </a:xfrm>
           <a:prstGeom prst="rect">
             <a:avLst/>
@@ -9681,13 +10388,13 @@
               <a:buChar char="•"/>
             </a:pPr>
             <a:r>
-              <a:rPr sz="2400">
+              <a:rPr sz="2600">
                 <a:solidFill>
                   <a:srgbClr val="1E293B"/>
                 </a:solidFill>
                 <a:latin typeface="Calibri"/>
               </a:rPr>
-              <a:t>Quy đồng: 3(x + y) ≥ 2(2x − y + 1)</a:t>
+              <a:t>Quét mã QR bằng điện thoại</a:t>
             </a:r>
           </a:p>
           <a:p>
@@ -9702,13 +10409,13 @@
               <a:buChar char="•"/>
             </a:pPr>
             <a:r>
-              <a:rPr sz="2400">
+              <a:rPr sz="2600">
                 <a:solidFill>
                   <a:srgbClr val="1E293B"/>
                 </a:solidFill>
                 <a:latin typeface="Calibri"/>
               </a:rPr>
-              <a:t>d qua (−2; 0) và (3; 1), nét liền</a:t>
+              <a:t>Nhập họ tên và lớp</a:t>
             </a:r>
           </a:p>
           <a:p>
@@ -9723,13 +10430,13 @@
               <a:buChar char="•"/>
             </a:pPr>
             <a:r>
-              <a:rPr sz="2400">
+              <a:rPr sz="2600">
                 <a:solidFill>
                   <a:srgbClr val="1E293B"/>
                 </a:solidFill>
                 <a:latin typeface="Calibri"/>
               </a:rPr>
-              <a:t>Thay O(0; 0): 2 ≤ 0 sai</a:t>
+              <a:t>7 câu – làm trong 7 phút</a:t>
             </a:r>
           </a:p>
           <a:p>
@@ -9744,75 +10451,27 @@
               <a:buChar char="•"/>
             </a:pPr>
             <a:r>
-              <a:rPr sz="2400">
+              <a:rPr sz="2600">
                 <a:solidFill>
                   <a:srgbClr val="1E293B"/>
                 </a:solidFill>
                 <a:latin typeface="Calibri"/>
               </a:rPr>
-              <a:t>Giữ nửa mặt phẳng không chứa O</a:t>
-            </a:r>
-          </a:p>
-        </p:txBody>
-      </p:sp>
-      <p:sp>
-        <p:nvSpPr>
-          <p:cNvPr id="7" name="Rounded Rectangle 6"/>
-          <p:cNvSpPr/>
-          <p:nvPr/>
-        </p:nvSpPr>
-        <p:spPr>
-          <a:xfrm>
-            <a:off x="731520" y="4754880"/>
-            <a:ext cx="6035040" cy="1097280"/>
-          </a:xfrm>
-          <a:prstGeom prst="roundRect">
-            <a:avLst>
-              <a:gd name="adj" fmla="val 8000"/>
-            </a:avLst>
-          </a:prstGeom>
-          <a:solidFill>
-            <a:srgbClr val="FEF2F2"/>
-          </a:solidFill>
-          <a:ln w="19050">
-            <a:solidFill>
-              <a:srgbClr val="991B1B"/>
-            </a:solidFill>
-          </a:ln>
-          <a:effectLst/>
-        </p:spPr>
-        <p:style>
-          <a:lnRef idx="1">
-            <a:schemeClr val="accent1"/>
-          </a:lnRef>
-          <a:fillRef idx="3">
-            <a:schemeClr val="accent1"/>
-          </a:fillRef>
-          <a:effectRef idx="2">
-            <a:schemeClr val="accent1"/>
-          </a:effectRef>
-          <a:fontRef idx="minor">
-            <a:schemeClr val="lt1"/>
-          </a:fontRef>
-        </p:style>
-        <p:txBody>
-          <a:bodyPr rtlCol="0" anchor="ctr"/>
-          <a:lstStyle/>
-          <a:p>
-            <a:pPr algn="ctr"/>
-          </a:p>
-        </p:txBody>
-      </p:sp>
-      <p:sp>
-        <p:nvSpPr>
-          <p:cNvPr id="8" name="TextBox 7"/>
+              <a:t>Nộp bài, xem lời giải</a:t>
+            </a:r>
+          </a:p>
+        </p:txBody>
+      </p:sp>
+      <p:sp>
+        <p:nvSpPr>
+          <p:cNvPr id="9" name="TextBox 8"/>
           <p:cNvSpPr txBox="1"/>
           <p:nvPr/>
         </p:nvSpPr>
         <p:spPr>
           <a:xfrm>
-            <a:off x="914400" y="4846320"/>
-            <a:ext cx="5669280" cy="914400"/>
+            <a:off x="5760720" y="4754880"/>
+            <a:ext cx="6035040" cy="1188720"/>
           </a:xfrm>
           <a:prstGeom prst="rect">
             <a:avLst/>
@@ -9820,7 +10479,7 @@
           <a:noFill/>
         </p:spPr>
         <p:txBody>
-          <a:bodyPr wrap="square" anchor="ctr">
+          <a:bodyPr wrap="square" anchor="t">
             <a:spAutoFit/>
           </a:bodyPr>
           <a:lstStyle/>
@@ -9831,41 +10490,18 @@
               </a:spcAft>
             </a:pPr>
             <a:r>
-              <a:rPr sz="2800" b="1">
-                <a:solidFill>
-                  <a:srgbClr val="991B1B"/>
+              <a:rPr sz="1800" b="1">
+                <a:solidFill>
+                  <a:srgbClr val="1E40AF"/>
                 </a:solidFill>
                 <a:latin typeface="Calibri"/>
-              </a:rPr>
-              <a:t>⇔  x − 5y + 2 ≤ 0</a:t>
-            </a:r>
-          </a:p>
-        </p:txBody>
-      </p:sp>
-      <p:pic>
-        <p:nvPicPr>
-          <p:cNvPr id="9" name="Picture 8" descr="fig_2_12.png"/>
-          <p:cNvPicPr>
-            <a:picLocks noChangeAspect="1"/>
-          </p:cNvPicPr>
-          <p:nvPr/>
-        </p:nvPicPr>
-        <p:blipFill>
-          <a:blip r:embed="rId2"/>
-          <a:stretch>
-            <a:fillRect/>
-          </a:stretch>
-        </p:blipFill>
-        <p:spPr>
-          <a:xfrm>
-            <a:off x="7132320" y="1737360"/>
-            <a:ext cx="4663440" cy="3586457"/>
-          </a:xfrm>
-          <a:prstGeom prst="rect">
-            <a:avLst/>
-          </a:prstGeom>
-        </p:spPr>
-      </p:pic>
+                <a:hlinkClick r:id="rId3"/>
+              </a:rPr>
+              <a:t>trangtu66.github.io/Taode_thi_online/cc_chuong2_t10.html</a:t>
+            </a:r>
+          </a:p>
+        </p:txBody>
+      </p:sp>
     </p:spTree>
   </p:cSld>
   <p:clrMapOvr>
